--- a/modulo-01/01.03 - Trabalhando com Classes Locais e Orientação a Objetos/01.03_Classes_locais_e_orientação_a_objetos.pptx
+++ b/modulo-01/01.03 - Trabalhando com Classes Locais e Orientação a Objetos/01.03_Classes_locais_e_orientação_a_objetos.pptx
@@ -4801,7 +4801,7 @@
         <p:spPr>
           <a:xfrm>
             <a:off x="640080" y="1700784"/>
-            <a:ext cx="2852928" cy="292608"/>
+            <a:ext cx="3474720" cy="292608"/>
           </a:xfrm>
           <a:prstGeom prst="rect">
             <a:avLst/>
@@ -4821,7 +4821,7 @@
         <p:spPr>
           <a:xfrm>
             <a:off x="640080" y="1700784"/>
-            <a:ext cx="2852928" cy="27432"/>
+            <a:ext cx="3474720" cy="27432"/>
           </a:xfrm>
           <a:prstGeom prst="rect">
             <a:avLst/>
@@ -4841,7 +4841,7 @@
         <p:spPr>
           <a:xfrm>
             <a:off x="731520" y="1719072"/>
-            <a:ext cx="2670048" cy="274320"/>
+            <a:ext cx="3291840" cy="274320"/>
           </a:xfrm>
           <a:prstGeom prst="rect">
             <a:avLst/>
@@ -4862,7 +4862,7 @@
                   <a:srgbClr val="FFFFFF"/>
                 </a:solidFill>
               </a:rPr>
-              <a:t>zcl_03_main.clas.locals_imp.abap</a:t>
+              <a:t>zcl_pc_estoque_demo.clas.locals_imp.abap</a:t>
             </a:r>
             <a:endParaRPr lang="en-US" sz="950" dirty="0"/>
           </a:p>
@@ -4898,7 +4898,7 @@
                   <a:srgbClr val="9DA5B4"/>
                 </a:solidFill>
               </a:rPr>
-              <a:t>ZCL_03_MAIN › Local Types</a:t>
+              <a:t>ZCL_PC_ESTOQUE_DEMO › Local Types</a:t>
             </a:r>
             <a:endParaRPr lang="en-US" sz="850" dirty="0"/>
           </a:p>
@@ -5364,26 +5364,6 @@
             </a:r>
             <a:endParaRPr lang="en-US" sz="950" dirty="0"/>
           </a:p>
-          <a:p>
-            <a:pPr algn="r" indent="0" marL="0">
-              <a:lnSpc>
-                <a:spcPct val="105000"/>
-              </a:lnSpc>
-              <a:buNone/>
-            </a:pPr>
-            <a:r>
-              <a:rPr lang="en-US" sz="950" dirty="0">
-                <a:solidFill>
-                  <a:srgbClr val="6E7681"/>
-                </a:solidFill>
-                <a:latin typeface="Courier New" pitchFamily="34" charset="0"/>
-                <a:ea typeface="Courier New" pitchFamily="34" charset="-122"/>
-                <a:cs typeface="Courier New" pitchFamily="34" charset="-120"/>
-              </a:rPr>
-              <a:t>23</a:t>
-            </a:r>
-            <a:endParaRPr lang="en-US" sz="950" dirty="0"/>
-          </a:p>
         </p:txBody>
       </p:sp>
       <p:sp>
@@ -5444,7 +5424,7 @@
                 <a:ea typeface="Courier New" pitchFamily="34" charset="-122"/>
                 <a:cs typeface="Courier New" pitchFamily="34" charset="-120"/>
               </a:rPr>
-              <a:t>lcl_connection</a:t>
+              <a:t>lcl_item</a:t>
             </a:r>
             <a:r>
               <a:rPr lang="en-US" sz="950" dirty="0">
@@ -5594,7 +5574,7 @@
                 <a:ea typeface="Courier New" pitchFamily="34" charset="-122"/>
                 <a:cs typeface="Courier New" pitchFamily="34" charset="-120"/>
               </a:rPr>
-              <a:t>set_attributes</a:t>
+              <a:t>reservar</a:t>
             </a:r>
             <a:endParaRPr lang="en-US" sz="950" dirty="0"/>
           </a:p>
@@ -5647,18 +5627,18 @@
                 <a:ea typeface="Courier New" pitchFamily="34" charset="-122"/>
                 <a:cs typeface="Courier New" pitchFamily="34" charset="-120"/>
               </a:rPr>
-              <a:t>i_carrier_id</a:t>
-            </a:r>
-            <a:r>
-              <a:rPr lang="en-US" sz="950" dirty="0">
-                <a:solidFill>
-                  <a:srgbClr val="CCCCCC"/>
-                </a:solidFill>
-                <a:latin typeface="Courier New" pitchFamily="34" charset="0"/>
-                <a:ea typeface="Courier New" pitchFamily="34" charset="-122"/>
-                <a:cs typeface="Courier New" pitchFamily="34" charset="-120"/>
-              </a:rPr>
-              <a:t>    </a:t>
+              <a:t>i_qtde</a:t>
+            </a:r>
+            <a:r>
+              <a:rPr lang="en-US" sz="950" dirty="0">
+                <a:solidFill>
+                  <a:srgbClr val="CCCCCC"/>
+                </a:solidFill>
+                <a:latin typeface="Courier New" pitchFamily="34" charset="0"/>
+                <a:ea typeface="Courier New" pitchFamily="34" charset="-122"/>
+                <a:cs typeface="Courier New" pitchFamily="34" charset="-120"/>
+              </a:rPr>
+              <a:t> </a:t>
             </a:r>
             <a:r>
               <a:rPr lang="en-US" sz="950" dirty="0">
@@ -5685,13 +5665,13 @@
             <a:r>
               <a:rPr lang="en-US" sz="950" dirty="0">
                 <a:solidFill>
-                  <a:srgbClr val="4EC9B0"/>
-                </a:solidFill>
-                <a:latin typeface="Courier New" pitchFamily="34" charset="0"/>
-                <a:ea typeface="Courier New" pitchFamily="34" charset="-122"/>
-                <a:cs typeface="Courier New" pitchFamily="34" charset="-120"/>
-              </a:rPr>
-              <a:t>/dmo/carrier_id</a:t>
+                  <a:srgbClr val="CCCCCC"/>
+                </a:solidFill>
+                <a:latin typeface="Courier New" pitchFamily="34" charset="0"/>
+                <a:ea typeface="Courier New" pitchFamily="34" charset="-122"/>
+                <a:cs typeface="Courier New" pitchFamily="34" charset="-120"/>
+              </a:rPr>
+              <a:t>i</a:t>
             </a:r>
             <a:r>
               <a:rPr lang="en-US" sz="950" dirty="0">
@@ -5729,13 +5709,13 @@
             <a:r>
               <a:rPr lang="en-US" sz="950" dirty="0">
                 <a:solidFill>
-                  <a:srgbClr val="CE9178"/>
-                </a:solidFill>
-                <a:latin typeface="Courier New" pitchFamily="34" charset="0"/>
-                <a:ea typeface="Courier New" pitchFamily="34" charset="-122"/>
-                <a:cs typeface="Courier New" pitchFamily="34" charset="-120"/>
-              </a:rPr>
-              <a:t>'LH'</a:t>
+                  <a:srgbClr val="B5CEA8"/>
+                </a:solidFill>
+                <a:latin typeface="Courier New" pitchFamily="34" charset="0"/>
+                <a:ea typeface="Courier New" pitchFamily="34" charset="-122"/>
+                <a:cs typeface="Courier New" pitchFamily="34" charset="-120"/>
+              </a:rPr>
+              <a:t>1</a:t>
             </a:r>
             <a:endParaRPr lang="en-US" sz="950" dirty="0"/>
           </a:p>
@@ -5755,29 +5735,7 @@
                 <a:ea typeface="Courier New" pitchFamily="34" charset="-122"/>
                 <a:cs typeface="Courier New" pitchFamily="34" charset="-120"/>
               </a:rPr>
-              <a:t>                </a:t>
-            </a:r>
-            <a:r>
-              <a:rPr lang="en-US" sz="950" dirty="0">
-                <a:solidFill>
-                  <a:srgbClr val="CCCCCC"/>
-                </a:solidFill>
-                <a:latin typeface="Courier New" pitchFamily="34" charset="0"/>
-                <a:ea typeface="Courier New" pitchFamily="34" charset="-122"/>
-                <a:cs typeface="Courier New" pitchFamily="34" charset="-120"/>
-              </a:rPr>
-              <a:t>i_connection_id</a:t>
-            </a:r>
-            <a:r>
-              <a:rPr lang="en-US" sz="950" dirty="0">
-                <a:solidFill>
-                  <a:srgbClr val="CCCCCC"/>
-                </a:solidFill>
-                <a:latin typeface="Courier New" pitchFamily="34" charset="0"/>
-                <a:ea typeface="Courier New" pitchFamily="34" charset="-122"/>
-                <a:cs typeface="Courier New" pitchFamily="34" charset="-120"/>
-              </a:rPr>
-              <a:t> </a:t>
+              <a:t>      </a:t>
             </a:r>
             <a:r>
               <a:rPr lang="en-US" sz="950" dirty="0">
@@ -5788,18 +5746,18 @@
                 <a:ea typeface="Courier New" pitchFamily="34" charset="-122"/>
                 <a:cs typeface="Courier New" pitchFamily="34" charset="-120"/>
               </a:rPr>
-              <a:t>TYPE</a:t>
-            </a:r>
-            <a:r>
-              <a:rPr lang="en-US" sz="950" dirty="0">
-                <a:solidFill>
-                  <a:srgbClr val="CCCCCC"/>
-                </a:solidFill>
-                <a:latin typeface="Courier New" pitchFamily="34" charset="0"/>
-                <a:ea typeface="Courier New" pitchFamily="34" charset="-122"/>
-                <a:cs typeface="Courier New" pitchFamily="34" charset="-120"/>
-              </a:rPr>
-              <a:t> </a:t>
+              <a:t>RAISING</a:t>
+            </a:r>
+            <a:r>
+              <a:rPr lang="en-US" sz="950" dirty="0">
+                <a:solidFill>
+                  <a:srgbClr val="CCCCCC"/>
+                </a:solidFill>
+                <a:latin typeface="Courier New" pitchFamily="34" charset="0"/>
+                <a:ea typeface="Courier New" pitchFamily="34" charset="-122"/>
+                <a:cs typeface="Courier New" pitchFamily="34" charset="-120"/>
+              </a:rPr>
+              <a:t>   </a:t>
             </a:r>
             <a:r>
               <a:rPr lang="en-US" sz="950" dirty="0">
@@ -5810,7 +5768,18 @@
                 <a:ea typeface="Courier New" pitchFamily="34" charset="-122"/>
                 <a:cs typeface="Courier New" pitchFamily="34" charset="-120"/>
               </a:rPr>
-              <a:t>/dmo/connection_id</a:t>
+              <a:t>cx_abap_invalid_value</a:t>
+            </a:r>
+            <a:r>
+              <a:rPr lang="en-US" sz="950" dirty="0">
+                <a:solidFill>
+                  <a:srgbClr val="CCCCCC"/>
+                </a:solidFill>
+                <a:latin typeface="Courier New" pitchFamily="34" charset="0"/>
+                <a:ea typeface="Courier New" pitchFamily="34" charset="-122"/>
+                <a:cs typeface="Courier New" pitchFamily="34" charset="-120"/>
+              </a:rPr>
+              <a:t>.</a:t>
             </a:r>
             <a:endParaRPr lang="en-US" sz="950" dirty="0"/>
           </a:p>
@@ -5830,7 +5799,7 @@
                 <a:ea typeface="Courier New" pitchFamily="34" charset="-122"/>
                 <a:cs typeface="Courier New" pitchFamily="34" charset="-120"/>
               </a:rPr>
-              <a:t>      </a:t>
+              <a:t>    </a:t>
             </a:r>
             <a:r>
               <a:rPr lang="en-US" sz="950" dirty="0">
@@ -5841,40 +5810,29 @@
                 <a:ea typeface="Courier New" pitchFamily="34" charset="-122"/>
                 <a:cs typeface="Courier New" pitchFamily="34" charset="-120"/>
               </a:rPr>
-              <a:t>RAISING</a:t>
-            </a:r>
-            <a:r>
-              <a:rPr lang="en-US" sz="950" dirty="0">
-                <a:solidFill>
-                  <a:srgbClr val="CCCCCC"/>
-                </a:solidFill>
-                <a:latin typeface="Courier New" pitchFamily="34" charset="0"/>
-                <a:ea typeface="Courier New" pitchFamily="34" charset="-122"/>
-                <a:cs typeface="Courier New" pitchFamily="34" charset="-120"/>
-              </a:rPr>
-              <a:t>   </a:t>
-            </a:r>
-            <a:r>
-              <a:rPr lang="en-US" sz="950" dirty="0">
-                <a:solidFill>
-                  <a:srgbClr val="4EC9B0"/>
-                </a:solidFill>
-                <a:latin typeface="Courier New" pitchFamily="34" charset="0"/>
-                <a:ea typeface="Courier New" pitchFamily="34" charset="-122"/>
-                <a:cs typeface="Courier New" pitchFamily="34" charset="-120"/>
-              </a:rPr>
-              <a:t>cx_abap_invalid_value</a:t>
-            </a:r>
-            <a:r>
-              <a:rPr lang="en-US" sz="950" dirty="0">
-                <a:solidFill>
-                  <a:srgbClr val="CCCCCC"/>
-                </a:solidFill>
-                <a:latin typeface="Courier New" pitchFamily="34" charset="0"/>
-                <a:ea typeface="Courier New" pitchFamily="34" charset="-122"/>
-                <a:cs typeface="Courier New" pitchFamily="34" charset="-120"/>
-              </a:rPr>
-              <a:t>.</a:t>
+              <a:t>METHODS</a:t>
+            </a:r>
+            <a:r>
+              <a:rPr lang="en-US" sz="950" dirty="0">
+                <a:solidFill>
+                  <a:srgbClr val="CCCCCC"/>
+                </a:solidFill>
+                <a:latin typeface="Courier New" pitchFamily="34" charset="0"/>
+                <a:ea typeface="Courier New" pitchFamily="34" charset="-122"/>
+                <a:cs typeface="Courier New" pitchFamily="34" charset="-120"/>
+              </a:rPr>
+              <a:t> </a:t>
+            </a:r>
+            <a:r>
+              <a:rPr lang="en-US" sz="950" dirty="0">
+                <a:solidFill>
+                  <a:srgbClr val="CCCCCC"/>
+                </a:solidFill>
+                <a:latin typeface="Courier New" pitchFamily="34" charset="0"/>
+                <a:ea typeface="Courier New" pitchFamily="34" charset="-122"/>
+                <a:cs typeface="Courier New" pitchFamily="34" charset="-120"/>
+              </a:rPr>
+              <a:t>get_output</a:t>
             </a:r>
             <a:endParaRPr lang="en-US" sz="950" dirty="0"/>
           </a:p>
@@ -5894,7 +5852,7 @@
                 <a:ea typeface="Courier New" pitchFamily="34" charset="-122"/>
                 <a:cs typeface="Courier New" pitchFamily="34" charset="-120"/>
               </a:rPr>
-              <a:t>    </a:t>
+              <a:t>      </a:t>
             </a:r>
             <a:r>
               <a:rPr lang="en-US" sz="950" dirty="0">
@@ -5905,7 +5863,7 @@
                 <a:ea typeface="Courier New" pitchFamily="34" charset="-122"/>
                 <a:cs typeface="Courier New" pitchFamily="34" charset="-120"/>
               </a:rPr>
-              <a:t>METHODS</a:t>
+              <a:t>RETURNING</a:t>
             </a:r>
             <a:r>
               <a:rPr lang="en-US" sz="950" dirty="0">
@@ -5921,13 +5879,101 @@
             <a:r>
               <a:rPr lang="en-US" sz="950" dirty="0">
                 <a:solidFill>
-                  <a:srgbClr val="CCCCCC"/>
-                </a:solidFill>
-                <a:latin typeface="Courier New" pitchFamily="34" charset="0"/>
-                <a:ea typeface="Courier New" pitchFamily="34" charset="-122"/>
-                <a:cs typeface="Courier New" pitchFamily="34" charset="-120"/>
-              </a:rPr>
-              <a:t>get_output</a:t>
+                  <a:srgbClr val="569CD6"/>
+                </a:solidFill>
+                <a:latin typeface="Courier New" pitchFamily="34" charset="0"/>
+                <a:ea typeface="Courier New" pitchFamily="34" charset="-122"/>
+                <a:cs typeface="Courier New" pitchFamily="34" charset="-120"/>
+              </a:rPr>
+              <a:t>VALUE</a:t>
+            </a:r>
+            <a:r>
+              <a:rPr lang="en-US" sz="950" dirty="0">
+                <a:solidFill>
+                  <a:srgbClr val="CCCCCC"/>
+                </a:solidFill>
+                <a:latin typeface="Courier New" pitchFamily="34" charset="0"/>
+                <a:ea typeface="Courier New" pitchFamily="34" charset="-122"/>
+                <a:cs typeface="Courier New" pitchFamily="34" charset="-120"/>
+              </a:rPr>
+              <a:t>(</a:t>
+            </a:r>
+            <a:r>
+              <a:rPr lang="en-US" sz="950" dirty="0">
+                <a:solidFill>
+                  <a:srgbClr val="CCCCCC"/>
+                </a:solidFill>
+                <a:latin typeface="Courier New" pitchFamily="34" charset="0"/>
+                <a:ea typeface="Courier New" pitchFamily="34" charset="-122"/>
+                <a:cs typeface="Courier New" pitchFamily="34" charset="-120"/>
+              </a:rPr>
+              <a:t>r_output</a:t>
+            </a:r>
+            <a:r>
+              <a:rPr lang="en-US" sz="950" dirty="0">
+                <a:solidFill>
+                  <a:srgbClr val="CCCCCC"/>
+                </a:solidFill>
+                <a:latin typeface="Courier New" pitchFamily="34" charset="0"/>
+                <a:ea typeface="Courier New" pitchFamily="34" charset="-122"/>
+                <a:cs typeface="Courier New" pitchFamily="34" charset="-120"/>
+              </a:rPr>
+              <a:t>)</a:t>
+            </a:r>
+            <a:r>
+              <a:rPr lang="en-US" sz="950" dirty="0">
+                <a:solidFill>
+                  <a:srgbClr val="CCCCCC"/>
+                </a:solidFill>
+                <a:latin typeface="Courier New" pitchFamily="34" charset="0"/>
+                <a:ea typeface="Courier New" pitchFamily="34" charset="-122"/>
+                <a:cs typeface="Courier New" pitchFamily="34" charset="-120"/>
+              </a:rPr>
+              <a:t> </a:t>
+            </a:r>
+            <a:r>
+              <a:rPr lang="en-US" sz="950" dirty="0">
+                <a:solidFill>
+                  <a:srgbClr val="569CD6"/>
+                </a:solidFill>
+                <a:latin typeface="Courier New" pitchFamily="34" charset="0"/>
+                <a:ea typeface="Courier New" pitchFamily="34" charset="-122"/>
+                <a:cs typeface="Courier New" pitchFamily="34" charset="-120"/>
+              </a:rPr>
+              <a:t>TYPE</a:t>
+            </a:r>
+            <a:r>
+              <a:rPr lang="en-US" sz="950" dirty="0">
+                <a:solidFill>
+                  <a:srgbClr val="CCCCCC"/>
+                </a:solidFill>
+                <a:latin typeface="Courier New" pitchFamily="34" charset="0"/>
+                <a:ea typeface="Courier New" pitchFamily="34" charset="-122"/>
+                <a:cs typeface="Courier New" pitchFamily="34" charset="-120"/>
+              </a:rPr>
+              <a:t> </a:t>
+            </a:r>
+            <a:r>
+              <a:rPr lang="en-US" sz="950" dirty="0">
+                <a:solidFill>
+                  <a:srgbClr val="CCCCCC"/>
+                </a:solidFill>
+                <a:latin typeface="Courier New" pitchFamily="34" charset="0"/>
+                <a:ea typeface="Courier New" pitchFamily="34" charset="-122"/>
+                <a:cs typeface="Courier New" pitchFamily="34" charset="-120"/>
+              </a:rPr>
+              <a:t>string_table</a:t>
+            </a:r>
+            <a:r>
+              <a:rPr lang="en-US" sz="950" dirty="0">
+                <a:solidFill>
+                  <a:srgbClr val="CCCCCC"/>
+                </a:solidFill>
+                <a:latin typeface="Courier New" pitchFamily="34" charset="0"/>
+                <a:ea typeface="Courier New" pitchFamily="34" charset="-122"/>
+                <a:cs typeface="Courier New" pitchFamily="34" charset="-120"/>
+              </a:rPr>
+              <a:t>.</a:t>
             </a:r>
             <a:endParaRPr lang="en-US" sz="950" dirty="0"/>
           </a:p>
@@ -5947,128 +5993,18 @@
                 <a:ea typeface="Courier New" pitchFamily="34" charset="-122"/>
                 <a:cs typeface="Courier New" pitchFamily="34" charset="-120"/>
               </a:rPr>
-              <a:t>      </a:t>
-            </a:r>
-            <a:r>
-              <a:rPr lang="en-US" sz="950" dirty="0">
-                <a:solidFill>
-                  <a:srgbClr val="569CD6"/>
-                </a:solidFill>
-                <a:latin typeface="Courier New" pitchFamily="34" charset="0"/>
-                <a:ea typeface="Courier New" pitchFamily="34" charset="-122"/>
-                <a:cs typeface="Courier New" pitchFamily="34" charset="-120"/>
-              </a:rPr>
-              <a:t>RETURNING</a:t>
-            </a:r>
-            <a:r>
-              <a:rPr lang="en-US" sz="950" dirty="0">
-                <a:solidFill>
-                  <a:srgbClr val="CCCCCC"/>
-                </a:solidFill>
-                <a:latin typeface="Courier New" pitchFamily="34" charset="0"/>
-                <a:ea typeface="Courier New" pitchFamily="34" charset="-122"/>
-                <a:cs typeface="Courier New" pitchFamily="34" charset="-120"/>
-              </a:rPr>
-              <a:t> </a:t>
-            </a:r>
-            <a:r>
-              <a:rPr lang="en-US" sz="950" dirty="0">
-                <a:solidFill>
-                  <a:srgbClr val="569CD6"/>
-                </a:solidFill>
-                <a:latin typeface="Courier New" pitchFamily="34" charset="0"/>
-                <a:ea typeface="Courier New" pitchFamily="34" charset="-122"/>
-                <a:cs typeface="Courier New" pitchFamily="34" charset="-120"/>
-              </a:rPr>
-              <a:t>VALUE</a:t>
-            </a:r>
-            <a:r>
-              <a:rPr lang="en-US" sz="950" dirty="0">
-                <a:solidFill>
-                  <a:srgbClr val="CCCCCC"/>
-                </a:solidFill>
-                <a:latin typeface="Courier New" pitchFamily="34" charset="0"/>
-                <a:ea typeface="Courier New" pitchFamily="34" charset="-122"/>
-                <a:cs typeface="Courier New" pitchFamily="34" charset="-120"/>
-              </a:rPr>
-              <a:t>(</a:t>
-            </a:r>
-            <a:r>
-              <a:rPr lang="en-US" sz="950" dirty="0">
-                <a:solidFill>
-                  <a:srgbClr val="CCCCCC"/>
-                </a:solidFill>
-                <a:latin typeface="Courier New" pitchFamily="34" charset="0"/>
-                <a:ea typeface="Courier New" pitchFamily="34" charset="-122"/>
-                <a:cs typeface="Courier New" pitchFamily="34" charset="-120"/>
-              </a:rPr>
-              <a:t>r_output</a:t>
-            </a:r>
-            <a:r>
-              <a:rPr lang="en-US" sz="950" dirty="0">
-                <a:solidFill>
-                  <a:srgbClr val="CCCCCC"/>
-                </a:solidFill>
-                <a:latin typeface="Courier New" pitchFamily="34" charset="0"/>
-                <a:ea typeface="Courier New" pitchFamily="34" charset="-122"/>
-                <a:cs typeface="Courier New" pitchFamily="34" charset="-120"/>
-              </a:rPr>
-              <a:t>)</a:t>
-            </a:r>
-            <a:r>
-              <a:rPr lang="en-US" sz="950" dirty="0">
-                <a:solidFill>
-                  <a:srgbClr val="CCCCCC"/>
-                </a:solidFill>
-                <a:latin typeface="Courier New" pitchFamily="34" charset="0"/>
-                <a:ea typeface="Courier New" pitchFamily="34" charset="-122"/>
-                <a:cs typeface="Courier New" pitchFamily="34" charset="-120"/>
-              </a:rPr>
-              <a:t> </a:t>
-            </a:r>
-            <a:r>
-              <a:rPr lang="en-US" sz="950" dirty="0">
-                <a:solidFill>
-                  <a:srgbClr val="569CD6"/>
-                </a:solidFill>
-                <a:latin typeface="Courier New" pitchFamily="34" charset="0"/>
-                <a:ea typeface="Courier New" pitchFamily="34" charset="-122"/>
-                <a:cs typeface="Courier New" pitchFamily="34" charset="-120"/>
-              </a:rPr>
-              <a:t>TYPE</a:t>
-            </a:r>
-            <a:r>
-              <a:rPr lang="en-US" sz="950" dirty="0">
-                <a:solidFill>
-                  <a:srgbClr val="CCCCCC"/>
-                </a:solidFill>
-                <a:latin typeface="Courier New" pitchFamily="34" charset="0"/>
-                <a:ea typeface="Courier New" pitchFamily="34" charset="-122"/>
-                <a:cs typeface="Courier New" pitchFamily="34" charset="-120"/>
-              </a:rPr>
-              <a:t> </a:t>
-            </a:r>
-            <a:r>
-              <a:rPr lang="en-US" sz="950" dirty="0">
-                <a:solidFill>
-                  <a:srgbClr val="CCCCCC"/>
-                </a:solidFill>
-                <a:latin typeface="Courier New" pitchFamily="34" charset="0"/>
-                <a:ea typeface="Courier New" pitchFamily="34" charset="-122"/>
-                <a:cs typeface="Courier New" pitchFamily="34" charset="-120"/>
-              </a:rPr>
-              <a:t>string_table</a:t>
-            </a:r>
-            <a:r>
-              <a:rPr lang="en-US" sz="950" dirty="0">
-                <a:solidFill>
-                  <a:srgbClr val="CCCCCC"/>
-                </a:solidFill>
-                <a:latin typeface="Courier New" pitchFamily="34" charset="0"/>
-                <a:ea typeface="Courier New" pitchFamily="34" charset="-122"/>
-                <a:cs typeface="Courier New" pitchFamily="34" charset="-120"/>
-              </a:rPr>
-              <a:t>.</a:t>
+              <a:t>    </a:t>
+            </a:r>
+            <a:r>
+              <a:rPr lang="en-US" sz="950" i="1" dirty="0">
+                <a:solidFill>
+                  <a:srgbClr val="6A9955"/>
+                </a:solidFill>
+                <a:latin typeface="Courier New" pitchFamily="34" charset="0"/>
+                <a:ea typeface="Courier New" pitchFamily="34" charset="-122"/>
+                <a:cs typeface="Courier New" pitchFamily="34" charset="-120"/>
+              </a:rPr>
+              <a:t>" … atributos</a:t>
             </a:r>
             <a:endParaRPr lang="en-US" sz="950" dirty="0"/>
           </a:p>
@@ -6082,24 +6018,24 @@
             <a:r>
               <a:rPr lang="en-US" sz="950" dirty="0">
                 <a:solidFill>
-                  <a:srgbClr val="CCCCCC"/>
-                </a:solidFill>
-                <a:latin typeface="Courier New" pitchFamily="34" charset="0"/>
-                <a:ea typeface="Courier New" pitchFamily="34" charset="-122"/>
-                <a:cs typeface="Courier New" pitchFamily="34" charset="-120"/>
-              </a:rPr>
-              <a:t>    </a:t>
-            </a:r>
-            <a:r>
-              <a:rPr lang="en-US" sz="950" i="1" dirty="0">
-                <a:solidFill>
-                  <a:srgbClr val="6A9955"/>
-                </a:solidFill>
-                <a:latin typeface="Courier New" pitchFamily="34" charset="0"/>
-                <a:ea typeface="Courier New" pitchFamily="34" charset="-122"/>
-                <a:cs typeface="Courier New" pitchFamily="34" charset="-120"/>
-              </a:rPr>
-              <a:t>" … atributos</a:t>
+                  <a:srgbClr val="569CD6"/>
+                </a:solidFill>
+                <a:latin typeface="Courier New" pitchFamily="34" charset="0"/>
+                <a:ea typeface="Courier New" pitchFamily="34" charset="-122"/>
+                <a:cs typeface="Courier New" pitchFamily="34" charset="-120"/>
+              </a:rPr>
+              <a:t>ENDCLASS</a:t>
+            </a:r>
+            <a:r>
+              <a:rPr lang="en-US" sz="950" dirty="0">
+                <a:solidFill>
+                  <a:srgbClr val="CCCCCC"/>
+                </a:solidFill>
+                <a:latin typeface="Courier New" pitchFamily="34" charset="0"/>
+                <a:ea typeface="Courier New" pitchFamily="34" charset="-122"/>
+                <a:cs typeface="Courier New" pitchFamily="34" charset="-120"/>
+              </a:rPr>
+              <a:t>.</a:t>
             </a:r>
             <a:endParaRPr lang="en-US" sz="950" dirty="0"/>
           </a:p>
@@ -6113,24 +6049,13 @@
             <a:r>
               <a:rPr lang="en-US" sz="950" dirty="0">
                 <a:solidFill>
-                  <a:srgbClr val="569CD6"/>
-                </a:solidFill>
-                <a:latin typeface="Courier New" pitchFamily="34" charset="0"/>
-                <a:ea typeface="Courier New" pitchFamily="34" charset="-122"/>
-                <a:cs typeface="Courier New" pitchFamily="34" charset="-120"/>
-              </a:rPr>
-              <a:t>ENDCLASS</a:t>
-            </a:r>
-            <a:r>
-              <a:rPr lang="en-US" sz="950" dirty="0">
-                <a:solidFill>
-                  <a:srgbClr val="CCCCCC"/>
-                </a:solidFill>
-                <a:latin typeface="Courier New" pitchFamily="34" charset="0"/>
-                <a:ea typeface="Courier New" pitchFamily="34" charset="-122"/>
-                <a:cs typeface="Courier New" pitchFamily="34" charset="-120"/>
-              </a:rPr>
-              <a:t>.</a:t>
+                  <a:srgbClr val="000000"/>
+                </a:solidFill>
+                <a:latin typeface="Courier New" pitchFamily="34" charset="0"/>
+                <a:ea typeface="Courier New" pitchFamily="34" charset="-122"/>
+                <a:cs typeface="Courier New" pitchFamily="34" charset="-120"/>
+              </a:rPr>
+              <a:t> </a:t>
             </a:r>
             <a:endParaRPr lang="en-US" sz="950" dirty="0"/>
           </a:p>
@@ -6144,13 +6069,68 @@
             <a:r>
               <a:rPr lang="en-US" sz="950" dirty="0">
                 <a:solidFill>
-                  <a:srgbClr val="000000"/>
+                  <a:srgbClr val="569CD6"/>
+                </a:solidFill>
+                <a:latin typeface="Courier New" pitchFamily="34" charset="0"/>
+                <a:ea typeface="Courier New" pitchFamily="34" charset="-122"/>
+                <a:cs typeface="Courier New" pitchFamily="34" charset="-120"/>
+              </a:rPr>
+              <a:t>CLASS</a:t>
+            </a:r>
+            <a:r>
+              <a:rPr lang="en-US" sz="950" dirty="0">
+                <a:solidFill>
+                  <a:srgbClr val="CCCCCC"/>
                 </a:solidFill>
                 <a:latin typeface="Courier New" pitchFamily="34" charset="0"/>
                 <a:ea typeface="Courier New" pitchFamily="34" charset="-122"/>
                 <a:cs typeface="Courier New" pitchFamily="34" charset="-120"/>
               </a:rPr>
               <a:t> </a:t>
+            </a:r>
+            <a:r>
+              <a:rPr lang="en-US" sz="950" dirty="0">
+                <a:solidFill>
+                  <a:srgbClr val="4EC9B0"/>
+                </a:solidFill>
+                <a:latin typeface="Courier New" pitchFamily="34" charset="0"/>
+                <a:ea typeface="Courier New" pitchFamily="34" charset="-122"/>
+                <a:cs typeface="Courier New" pitchFamily="34" charset="-120"/>
+              </a:rPr>
+              <a:t>lcl_item</a:t>
+            </a:r>
+            <a:r>
+              <a:rPr lang="en-US" sz="950" dirty="0">
+                <a:solidFill>
+                  <a:srgbClr val="CCCCCC"/>
+                </a:solidFill>
+                <a:latin typeface="Courier New" pitchFamily="34" charset="0"/>
+                <a:ea typeface="Courier New" pitchFamily="34" charset="-122"/>
+                <a:cs typeface="Courier New" pitchFamily="34" charset="-120"/>
+              </a:rPr>
+              <a:t> </a:t>
+            </a:r>
+            <a:r>
+              <a:rPr lang="en-US" sz="950" dirty="0">
+                <a:solidFill>
+                  <a:srgbClr val="569CD6"/>
+                </a:solidFill>
+                <a:latin typeface="Courier New" pitchFamily="34" charset="0"/>
+                <a:ea typeface="Courier New" pitchFamily="34" charset="-122"/>
+                <a:cs typeface="Courier New" pitchFamily="34" charset="-120"/>
+              </a:rPr>
+              <a:t>IMPLEMENTATION</a:t>
+            </a:r>
+            <a:r>
+              <a:rPr lang="en-US" sz="950" dirty="0">
+                <a:solidFill>
+                  <a:srgbClr val="CCCCCC"/>
+                </a:solidFill>
+                <a:latin typeface="Courier New" pitchFamily="34" charset="0"/>
+                <a:ea typeface="Courier New" pitchFamily="34" charset="-122"/>
+                <a:cs typeface="Courier New" pitchFamily="34" charset="-120"/>
+              </a:rPr>
+              <a:t>.</a:t>
             </a:r>
             <a:endParaRPr lang="en-US" sz="950" dirty="0"/>
           </a:p>
@@ -6164,13 +6144,24 @@
             <a:r>
               <a:rPr lang="en-US" sz="950" dirty="0">
                 <a:solidFill>
+                  <a:srgbClr val="CCCCCC"/>
+                </a:solidFill>
+                <a:latin typeface="Courier New" pitchFamily="34" charset="0"/>
+                <a:ea typeface="Courier New" pitchFamily="34" charset="-122"/>
+                <a:cs typeface="Courier New" pitchFamily="34" charset="-120"/>
+              </a:rPr>
+              <a:t>  </a:t>
+            </a:r>
+            <a:r>
+              <a:rPr lang="en-US" sz="950" dirty="0">
+                <a:solidFill>
                   <a:srgbClr val="569CD6"/>
                 </a:solidFill>
                 <a:latin typeface="Courier New" pitchFamily="34" charset="0"/>
                 <a:ea typeface="Courier New" pitchFamily="34" charset="-122"/>
                 <a:cs typeface="Courier New" pitchFamily="34" charset="-120"/>
               </a:rPr>
-              <a:t>CLASS</a:t>
+              <a:t>METHOD</a:t>
             </a:r>
             <a:r>
               <a:rPr lang="en-US" sz="950" dirty="0">
@@ -6186,35 +6177,13 @@
             <a:r>
               <a:rPr lang="en-US" sz="950" dirty="0">
                 <a:solidFill>
-                  <a:srgbClr val="4EC9B0"/>
-                </a:solidFill>
-                <a:latin typeface="Courier New" pitchFamily="34" charset="0"/>
-                <a:ea typeface="Courier New" pitchFamily="34" charset="-122"/>
-                <a:cs typeface="Courier New" pitchFamily="34" charset="-120"/>
-              </a:rPr>
-              <a:t>lcl_connection</a:t>
-            </a:r>
-            <a:r>
-              <a:rPr lang="en-US" sz="950" dirty="0">
-                <a:solidFill>
-                  <a:srgbClr val="CCCCCC"/>
-                </a:solidFill>
-                <a:latin typeface="Courier New" pitchFamily="34" charset="0"/>
-                <a:ea typeface="Courier New" pitchFamily="34" charset="-122"/>
-                <a:cs typeface="Courier New" pitchFamily="34" charset="-120"/>
-              </a:rPr>
-              <a:t> </a:t>
-            </a:r>
-            <a:r>
-              <a:rPr lang="en-US" sz="950" dirty="0">
-                <a:solidFill>
-                  <a:srgbClr val="569CD6"/>
-                </a:solidFill>
-                <a:latin typeface="Courier New" pitchFamily="34" charset="0"/>
-                <a:ea typeface="Courier New" pitchFamily="34" charset="-122"/>
-                <a:cs typeface="Courier New" pitchFamily="34" charset="-120"/>
-              </a:rPr>
-              <a:t>IMPLEMENTATION</a:t>
+                  <a:srgbClr val="CCCCCC"/>
+                </a:solidFill>
+                <a:latin typeface="Courier New" pitchFamily="34" charset="0"/>
+                <a:ea typeface="Courier New" pitchFamily="34" charset="-122"/>
+                <a:cs typeface="Courier New" pitchFamily="34" charset="-120"/>
+              </a:rPr>
+              <a:t>reservar</a:t>
             </a:r>
             <a:r>
               <a:rPr lang="en-US" sz="950" dirty="0">
@@ -6245,7 +6214,7 @@
                 <a:ea typeface="Courier New" pitchFamily="34" charset="-122"/>
                 <a:cs typeface="Courier New" pitchFamily="34" charset="-120"/>
               </a:rPr>
-              <a:t>  </a:t>
+              <a:t>    </a:t>
             </a:r>
             <a:r>
               <a:rPr lang="en-US" sz="950" dirty="0">
@@ -6256,7 +6225,7 @@
                 <a:ea typeface="Courier New" pitchFamily="34" charset="-122"/>
                 <a:cs typeface="Courier New" pitchFamily="34" charset="-120"/>
               </a:rPr>
-              <a:t>METHOD</a:t>
+              <a:t>IF</a:t>
             </a:r>
             <a:r>
               <a:rPr lang="en-US" sz="950" dirty="0">
@@ -6278,7 +6247,194 @@
                 <a:ea typeface="Courier New" pitchFamily="34" charset="-122"/>
                 <a:cs typeface="Courier New" pitchFamily="34" charset="-120"/>
               </a:rPr>
-              <a:t>set_attributes</a:t>
+              <a:t>i_qtde</a:t>
+            </a:r>
+            <a:r>
+              <a:rPr lang="en-US" sz="950" dirty="0">
+                <a:solidFill>
+                  <a:srgbClr val="CCCCCC"/>
+                </a:solidFill>
+                <a:latin typeface="Courier New" pitchFamily="34" charset="0"/>
+                <a:ea typeface="Courier New" pitchFamily="34" charset="-122"/>
+                <a:cs typeface="Courier New" pitchFamily="34" charset="-120"/>
+              </a:rPr>
+              <a:t> </a:t>
+            </a:r>
+            <a:r>
+              <a:rPr lang="en-US" sz="950" dirty="0">
+                <a:solidFill>
+                  <a:srgbClr val="CCCCCC"/>
+                </a:solidFill>
+                <a:latin typeface="Courier New" pitchFamily="34" charset="0"/>
+                <a:ea typeface="Courier New" pitchFamily="34" charset="-122"/>
+                <a:cs typeface="Courier New" pitchFamily="34" charset="-120"/>
+              </a:rPr>
+              <a:t>&lt;</a:t>
+            </a:r>
+            <a:r>
+              <a:rPr lang="en-US" sz="950" dirty="0">
+                <a:solidFill>
+                  <a:srgbClr val="CCCCCC"/>
+                </a:solidFill>
+                <a:latin typeface="Courier New" pitchFamily="34" charset="0"/>
+                <a:ea typeface="Courier New" pitchFamily="34" charset="-122"/>
+                <a:cs typeface="Courier New" pitchFamily="34" charset="-120"/>
+              </a:rPr>
+              <a:t>=</a:t>
+            </a:r>
+            <a:r>
+              <a:rPr lang="en-US" sz="950" dirty="0">
+                <a:solidFill>
+                  <a:srgbClr val="CCCCCC"/>
+                </a:solidFill>
+                <a:latin typeface="Courier New" pitchFamily="34" charset="0"/>
+                <a:ea typeface="Courier New" pitchFamily="34" charset="-122"/>
+                <a:cs typeface="Courier New" pitchFamily="34" charset="-120"/>
+              </a:rPr>
+              <a:t> </a:t>
+            </a:r>
+            <a:r>
+              <a:rPr lang="en-US" sz="950" dirty="0">
+                <a:solidFill>
+                  <a:srgbClr val="B5CEA8"/>
+                </a:solidFill>
+                <a:latin typeface="Courier New" pitchFamily="34" charset="0"/>
+                <a:ea typeface="Courier New" pitchFamily="34" charset="-122"/>
+                <a:cs typeface="Courier New" pitchFamily="34" charset="-120"/>
+              </a:rPr>
+              <a:t>0</a:t>
+            </a:r>
+            <a:r>
+              <a:rPr lang="en-US" sz="950" dirty="0">
+                <a:solidFill>
+                  <a:srgbClr val="CCCCCC"/>
+                </a:solidFill>
+                <a:latin typeface="Courier New" pitchFamily="34" charset="0"/>
+                <a:ea typeface="Courier New" pitchFamily="34" charset="-122"/>
+                <a:cs typeface="Courier New" pitchFamily="34" charset="-120"/>
+              </a:rPr>
+              <a:t> </a:t>
+            </a:r>
+            <a:r>
+              <a:rPr lang="en-US" sz="950" dirty="0">
+                <a:solidFill>
+                  <a:srgbClr val="569CD6"/>
+                </a:solidFill>
+                <a:latin typeface="Courier New" pitchFamily="34" charset="0"/>
+                <a:ea typeface="Courier New" pitchFamily="34" charset="-122"/>
+                <a:cs typeface="Courier New" pitchFamily="34" charset="-120"/>
+              </a:rPr>
+              <a:t>OR</a:t>
+            </a:r>
+            <a:r>
+              <a:rPr lang="en-US" sz="950" dirty="0">
+                <a:solidFill>
+                  <a:srgbClr val="CCCCCC"/>
+                </a:solidFill>
+                <a:latin typeface="Courier New" pitchFamily="34" charset="0"/>
+                <a:ea typeface="Courier New" pitchFamily="34" charset="-122"/>
+                <a:cs typeface="Courier New" pitchFamily="34" charset="-120"/>
+              </a:rPr>
+              <a:t> </a:t>
+            </a:r>
+            <a:r>
+              <a:rPr lang="en-US" sz="950" dirty="0">
+                <a:solidFill>
+                  <a:srgbClr val="CCCCCC"/>
+                </a:solidFill>
+                <a:latin typeface="Courier New" pitchFamily="34" charset="0"/>
+                <a:ea typeface="Courier New" pitchFamily="34" charset="-122"/>
+                <a:cs typeface="Courier New" pitchFamily="34" charset="-120"/>
+              </a:rPr>
+              <a:t>i_qtde</a:t>
+            </a:r>
+            <a:r>
+              <a:rPr lang="en-US" sz="950" dirty="0">
+                <a:solidFill>
+                  <a:srgbClr val="CCCCCC"/>
+                </a:solidFill>
+                <a:latin typeface="Courier New" pitchFamily="34" charset="0"/>
+                <a:ea typeface="Courier New" pitchFamily="34" charset="-122"/>
+                <a:cs typeface="Courier New" pitchFamily="34" charset="-120"/>
+              </a:rPr>
+              <a:t> </a:t>
+            </a:r>
+            <a:r>
+              <a:rPr lang="en-US" sz="950" dirty="0">
+                <a:solidFill>
+                  <a:srgbClr val="CCCCCC"/>
+                </a:solidFill>
+                <a:latin typeface="Courier New" pitchFamily="34" charset="0"/>
+                <a:ea typeface="Courier New" pitchFamily="34" charset="-122"/>
+                <a:cs typeface="Courier New" pitchFamily="34" charset="-120"/>
+              </a:rPr>
+              <a:t>&gt;</a:t>
+            </a:r>
+            <a:r>
+              <a:rPr lang="en-US" sz="950" dirty="0">
+                <a:solidFill>
+                  <a:srgbClr val="CCCCCC"/>
+                </a:solidFill>
+                <a:latin typeface="Courier New" pitchFamily="34" charset="0"/>
+                <a:ea typeface="Courier New" pitchFamily="34" charset="-122"/>
+                <a:cs typeface="Courier New" pitchFamily="34" charset="-120"/>
+              </a:rPr>
+              <a:t> </a:t>
+            </a:r>
+            <a:r>
+              <a:rPr lang="en-US" sz="950" dirty="0">
+                <a:solidFill>
+                  <a:srgbClr val="CCCCCC"/>
+                </a:solidFill>
+                <a:latin typeface="Courier New" pitchFamily="34" charset="0"/>
+                <a:ea typeface="Courier New" pitchFamily="34" charset="-122"/>
+                <a:cs typeface="Courier New" pitchFamily="34" charset="-120"/>
+              </a:rPr>
+              <a:t>qtde_estoque</a:t>
+            </a:r>
+            <a:r>
+              <a:rPr lang="en-US" sz="950" dirty="0">
+                <a:solidFill>
+                  <a:srgbClr val="CCCCCC"/>
+                </a:solidFill>
+                <a:latin typeface="Courier New" pitchFamily="34" charset="0"/>
+                <a:ea typeface="Courier New" pitchFamily="34" charset="-122"/>
+                <a:cs typeface="Courier New" pitchFamily="34" charset="-120"/>
+              </a:rPr>
+              <a:t> </a:t>
+            </a:r>
+            <a:r>
+              <a:rPr lang="en-US" sz="950" dirty="0">
+                <a:solidFill>
+                  <a:srgbClr val="CCCCCC"/>
+                </a:solidFill>
+                <a:latin typeface="Courier New" pitchFamily="34" charset="0"/>
+                <a:ea typeface="Courier New" pitchFamily="34" charset="-122"/>
+                <a:cs typeface="Courier New" pitchFamily="34" charset="-120"/>
+              </a:rPr>
+              <a:t>-</a:t>
+            </a:r>
+            <a:r>
+              <a:rPr lang="en-US" sz="950" dirty="0">
+                <a:solidFill>
+                  <a:srgbClr val="CCCCCC"/>
+                </a:solidFill>
+                <a:latin typeface="Courier New" pitchFamily="34" charset="0"/>
+                <a:ea typeface="Courier New" pitchFamily="34" charset="-122"/>
+                <a:cs typeface="Courier New" pitchFamily="34" charset="-120"/>
+              </a:rPr>
+              <a:t> </a:t>
+            </a:r>
+            <a:r>
+              <a:rPr lang="en-US" sz="950" dirty="0">
+                <a:solidFill>
+                  <a:srgbClr val="CCCCCC"/>
+                </a:solidFill>
+                <a:latin typeface="Courier New" pitchFamily="34" charset="0"/>
+                <a:ea typeface="Courier New" pitchFamily="34" charset="-122"/>
+                <a:cs typeface="Courier New" pitchFamily="34" charset="-120"/>
+              </a:rPr>
+              <a:t>qtde_reservada</a:t>
             </a:r>
             <a:r>
               <a:rPr lang="en-US" sz="950" dirty="0">
@@ -6309,7 +6465,7 @@
                 <a:ea typeface="Courier New" pitchFamily="34" charset="-122"/>
                 <a:cs typeface="Courier New" pitchFamily="34" charset="-120"/>
               </a:rPr>
-              <a:t>    </a:t>
+              <a:t>      </a:t>
             </a:r>
             <a:r>
               <a:rPr lang="en-US" sz="950" dirty="0">
@@ -6320,7 +6476,7 @@
                 <a:ea typeface="Courier New" pitchFamily="34" charset="-122"/>
                 <a:cs typeface="Courier New" pitchFamily="34" charset="-120"/>
               </a:rPr>
-              <a:t>IF</a:t>
+              <a:t>RAISE</a:t>
             </a:r>
             <a:r>
               <a:rPr lang="en-US" sz="950" dirty="0">
@@ -6336,13 +6492,13 @@
             <a:r>
               <a:rPr lang="en-US" sz="950" dirty="0">
                 <a:solidFill>
-                  <a:srgbClr val="CCCCCC"/>
-                </a:solidFill>
-                <a:latin typeface="Courier New" pitchFamily="34" charset="0"/>
-                <a:ea typeface="Courier New" pitchFamily="34" charset="-122"/>
-                <a:cs typeface="Courier New" pitchFamily="34" charset="-120"/>
-              </a:rPr>
-              <a:t>i_carrier_id</a:t>
+                  <a:srgbClr val="569CD6"/>
+                </a:solidFill>
+                <a:latin typeface="Courier New" pitchFamily="34" charset="0"/>
+                <a:ea typeface="Courier New" pitchFamily="34" charset="-122"/>
+                <a:cs typeface="Courier New" pitchFamily="34" charset="-120"/>
+              </a:rPr>
+              <a:t>EXCEPTION</a:t>
             </a:r>
             <a:r>
               <a:rPr lang="en-US" sz="950" dirty="0">
@@ -6364,7 +6520,7 @@
                 <a:ea typeface="Courier New" pitchFamily="34" charset="-122"/>
                 <a:cs typeface="Courier New" pitchFamily="34" charset="-120"/>
               </a:rPr>
-              <a:t>IS</a:t>
+              <a:t>TYPE</a:t>
             </a:r>
             <a:r>
               <a:rPr lang="en-US" sz="950" dirty="0">
@@ -6380,101 +6536,13 @@
             <a:r>
               <a:rPr lang="en-US" sz="950" dirty="0">
                 <a:solidFill>
-                  <a:srgbClr val="569CD6"/>
-                </a:solidFill>
-                <a:latin typeface="Courier New" pitchFamily="34" charset="0"/>
-                <a:ea typeface="Courier New" pitchFamily="34" charset="-122"/>
-                <a:cs typeface="Courier New" pitchFamily="34" charset="-120"/>
-              </a:rPr>
-              <a:t>INITIAL</a:t>
-            </a:r>
-            <a:r>
-              <a:rPr lang="en-US" sz="950" dirty="0">
-                <a:solidFill>
-                  <a:srgbClr val="CCCCCC"/>
-                </a:solidFill>
-                <a:latin typeface="Courier New" pitchFamily="34" charset="0"/>
-                <a:ea typeface="Courier New" pitchFamily="34" charset="-122"/>
-                <a:cs typeface="Courier New" pitchFamily="34" charset="-120"/>
-              </a:rPr>
-              <a:t> </a:t>
-            </a:r>
-            <a:r>
-              <a:rPr lang="en-US" sz="950" dirty="0">
-                <a:solidFill>
-                  <a:srgbClr val="569CD6"/>
-                </a:solidFill>
-                <a:latin typeface="Courier New" pitchFamily="34" charset="0"/>
-                <a:ea typeface="Courier New" pitchFamily="34" charset="-122"/>
-                <a:cs typeface="Courier New" pitchFamily="34" charset="-120"/>
-              </a:rPr>
-              <a:t>OR</a:t>
-            </a:r>
-            <a:r>
-              <a:rPr lang="en-US" sz="950" dirty="0">
-                <a:solidFill>
-                  <a:srgbClr val="CCCCCC"/>
-                </a:solidFill>
-                <a:latin typeface="Courier New" pitchFamily="34" charset="0"/>
-                <a:ea typeface="Courier New" pitchFamily="34" charset="-122"/>
-                <a:cs typeface="Courier New" pitchFamily="34" charset="-120"/>
-              </a:rPr>
-              <a:t> </a:t>
-            </a:r>
-            <a:r>
-              <a:rPr lang="en-US" sz="950" dirty="0">
-                <a:solidFill>
-                  <a:srgbClr val="CCCCCC"/>
-                </a:solidFill>
-                <a:latin typeface="Courier New" pitchFamily="34" charset="0"/>
-                <a:ea typeface="Courier New" pitchFamily="34" charset="-122"/>
-                <a:cs typeface="Courier New" pitchFamily="34" charset="-120"/>
-              </a:rPr>
-              <a:t>i_connection_id</a:t>
-            </a:r>
-            <a:r>
-              <a:rPr lang="en-US" sz="950" dirty="0">
-                <a:solidFill>
-                  <a:srgbClr val="CCCCCC"/>
-                </a:solidFill>
-                <a:latin typeface="Courier New" pitchFamily="34" charset="0"/>
-                <a:ea typeface="Courier New" pitchFamily="34" charset="-122"/>
-                <a:cs typeface="Courier New" pitchFamily="34" charset="-120"/>
-              </a:rPr>
-              <a:t> </a:t>
-            </a:r>
-            <a:r>
-              <a:rPr lang="en-US" sz="950" dirty="0">
-                <a:solidFill>
-                  <a:srgbClr val="569CD6"/>
-                </a:solidFill>
-                <a:latin typeface="Courier New" pitchFamily="34" charset="0"/>
-                <a:ea typeface="Courier New" pitchFamily="34" charset="-122"/>
-                <a:cs typeface="Courier New" pitchFamily="34" charset="-120"/>
-              </a:rPr>
-              <a:t>IS</a:t>
-            </a:r>
-            <a:r>
-              <a:rPr lang="en-US" sz="950" dirty="0">
-                <a:solidFill>
-                  <a:srgbClr val="CCCCCC"/>
-                </a:solidFill>
-                <a:latin typeface="Courier New" pitchFamily="34" charset="0"/>
-                <a:ea typeface="Courier New" pitchFamily="34" charset="-122"/>
-                <a:cs typeface="Courier New" pitchFamily="34" charset="-120"/>
-              </a:rPr>
-              <a:t> </a:t>
-            </a:r>
-            <a:r>
-              <a:rPr lang="en-US" sz="950" dirty="0">
-                <a:solidFill>
-                  <a:srgbClr val="569CD6"/>
-                </a:solidFill>
-                <a:latin typeface="Courier New" pitchFamily="34" charset="0"/>
-                <a:ea typeface="Courier New" pitchFamily="34" charset="-122"/>
-                <a:cs typeface="Courier New" pitchFamily="34" charset="-120"/>
-              </a:rPr>
-              <a:t>INITIAL</a:t>
+                  <a:srgbClr val="4EC9B0"/>
+                </a:solidFill>
+                <a:latin typeface="Courier New" pitchFamily="34" charset="0"/>
+                <a:ea typeface="Courier New" pitchFamily="34" charset="-122"/>
+                <a:cs typeface="Courier New" pitchFamily="34" charset="-120"/>
+              </a:rPr>
+              <a:t>cx_abap_invalid_value</a:t>
             </a:r>
             <a:r>
               <a:rPr lang="en-US" sz="950" dirty="0">
@@ -6505,7 +6573,7 @@
                 <a:ea typeface="Courier New" pitchFamily="34" charset="-122"/>
                 <a:cs typeface="Courier New" pitchFamily="34" charset="-120"/>
               </a:rPr>
-              <a:t>      </a:t>
+              <a:t>    </a:t>
             </a:r>
             <a:r>
               <a:rPr lang="en-US" sz="950" dirty="0">
@@ -6516,73 +6584,7 @@
                 <a:ea typeface="Courier New" pitchFamily="34" charset="-122"/>
                 <a:cs typeface="Courier New" pitchFamily="34" charset="-120"/>
               </a:rPr>
-              <a:t>RAISE</a:t>
-            </a:r>
-            <a:r>
-              <a:rPr lang="en-US" sz="950" dirty="0">
-                <a:solidFill>
-                  <a:srgbClr val="CCCCCC"/>
-                </a:solidFill>
-                <a:latin typeface="Courier New" pitchFamily="34" charset="0"/>
-                <a:ea typeface="Courier New" pitchFamily="34" charset="-122"/>
-                <a:cs typeface="Courier New" pitchFamily="34" charset="-120"/>
-              </a:rPr>
-              <a:t> </a:t>
-            </a:r>
-            <a:r>
-              <a:rPr lang="en-US" sz="950" dirty="0">
-                <a:solidFill>
-                  <a:srgbClr val="569CD6"/>
-                </a:solidFill>
-                <a:latin typeface="Courier New" pitchFamily="34" charset="0"/>
-                <a:ea typeface="Courier New" pitchFamily="34" charset="-122"/>
-                <a:cs typeface="Courier New" pitchFamily="34" charset="-120"/>
-              </a:rPr>
-              <a:t>EXCEPTION</a:t>
-            </a:r>
-            <a:r>
-              <a:rPr lang="en-US" sz="950" dirty="0">
-                <a:solidFill>
-                  <a:srgbClr val="CCCCCC"/>
-                </a:solidFill>
-                <a:latin typeface="Courier New" pitchFamily="34" charset="0"/>
-                <a:ea typeface="Courier New" pitchFamily="34" charset="-122"/>
-                <a:cs typeface="Courier New" pitchFamily="34" charset="-120"/>
-              </a:rPr>
-              <a:t> </a:t>
-            </a:r>
-            <a:r>
-              <a:rPr lang="en-US" sz="950" dirty="0">
-                <a:solidFill>
-                  <a:srgbClr val="569CD6"/>
-                </a:solidFill>
-                <a:latin typeface="Courier New" pitchFamily="34" charset="0"/>
-                <a:ea typeface="Courier New" pitchFamily="34" charset="-122"/>
-                <a:cs typeface="Courier New" pitchFamily="34" charset="-120"/>
-              </a:rPr>
-              <a:t>TYPE</a:t>
-            </a:r>
-            <a:r>
-              <a:rPr lang="en-US" sz="950" dirty="0">
-                <a:solidFill>
-                  <a:srgbClr val="CCCCCC"/>
-                </a:solidFill>
-                <a:latin typeface="Courier New" pitchFamily="34" charset="0"/>
-                <a:ea typeface="Courier New" pitchFamily="34" charset="-122"/>
-                <a:cs typeface="Courier New" pitchFamily="34" charset="-120"/>
-              </a:rPr>
-              <a:t> </a:t>
-            </a:r>
-            <a:r>
-              <a:rPr lang="en-US" sz="950" dirty="0">
-                <a:solidFill>
-                  <a:srgbClr val="4EC9B0"/>
-                </a:solidFill>
-                <a:latin typeface="Courier New" pitchFamily="34" charset="0"/>
-                <a:ea typeface="Courier New" pitchFamily="34" charset="-122"/>
-                <a:cs typeface="Courier New" pitchFamily="34" charset="-120"/>
-              </a:rPr>
-              <a:t>cx_abap_invalid_value</a:t>
+              <a:t>ENDIF</a:t>
             </a:r>
             <a:r>
               <a:rPr lang="en-US" sz="950" dirty="0">
@@ -6618,13 +6620,68 @@
             <a:r>
               <a:rPr lang="en-US" sz="950" dirty="0">
                 <a:solidFill>
-                  <a:srgbClr val="569CD6"/>
-                </a:solidFill>
-                <a:latin typeface="Courier New" pitchFamily="34" charset="0"/>
-                <a:ea typeface="Courier New" pitchFamily="34" charset="-122"/>
-                <a:cs typeface="Courier New" pitchFamily="34" charset="-120"/>
-              </a:rPr>
-              <a:t>ENDIF</a:t>
+                  <a:srgbClr val="CCCCCC"/>
+                </a:solidFill>
+                <a:latin typeface="Courier New" pitchFamily="34" charset="0"/>
+                <a:ea typeface="Courier New" pitchFamily="34" charset="-122"/>
+                <a:cs typeface="Courier New" pitchFamily="34" charset="-120"/>
+              </a:rPr>
+              <a:t>qtde_reservada</a:t>
+            </a:r>
+            <a:r>
+              <a:rPr lang="en-US" sz="950" dirty="0">
+                <a:solidFill>
+                  <a:srgbClr val="CCCCCC"/>
+                </a:solidFill>
+                <a:latin typeface="Courier New" pitchFamily="34" charset="0"/>
+                <a:ea typeface="Courier New" pitchFamily="34" charset="-122"/>
+                <a:cs typeface="Courier New" pitchFamily="34" charset="-120"/>
+              </a:rPr>
+              <a:t> </a:t>
+            </a:r>
+            <a:r>
+              <a:rPr lang="en-US" sz="950" dirty="0">
+                <a:solidFill>
+                  <a:srgbClr val="CCCCCC"/>
+                </a:solidFill>
+                <a:latin typeface="Courier New" pitchFamily="34" charset="0"/>
+                <a:ea typeface="Courier New" pitchFamily="34" charset="-122"/>
+                <a:cs typeface="Courier New" pitchFamily="34" charset="-120"/>
+              </a:rPr>
+              <a:t>+</a:t>
+            </a:r>
+            <a:r>
+              <a:rPr lang="en-US" sz="950" dirty="0">
+                <a:solidFill>
+                  <a:srgbClr val="CCCCCC"/>
+                </a:solidFill>
+                <a:latin typeface="Courier New" pitchFamily="34" charset="0"/>
+                <a:ea typeface="Courier New" pitchFamily="34" charset="-122"/>
+                <a:cs typeface="Courier New" pitchFamily="34" charset="-120"/>
+              </a:rPr>
+              <a:t>=</a:t>
+            </a:r>
+            <a:r>
+              <a:rPr lang="en-US" sz="950" dirty="0">
+                <a:solidFill>
+                  <a:srgbClr val="CCCCCC"/>
+                </a:solidFill>
+                <a:latin typeface="Courier New" pitchFamily="34" charset="0"/>
+                <a:ea typeface="Courier New" pitchFamily="34" charset="-122"/>
+                <a:cs typeface="Courier New" pitchFamily="34" charset="-120"/>
+              </a:rPr>
+              <a:t> </a:t>
+            </a:r>
+            <a:r>
+              <a:rPr lang="en-US" sz="950" dirty="0">
+                <a:solidFill>
+                  <a:srgbClr val="CCCCCC"/>
+                </a:solidFill>
+                <a:latin typeface="Courier New" pitchFamily="34" charset="0"/>
+                <a:ea typeface="Courier New" pitchFamily="34" charset="-122"/>
+                <a:cs typeface="Courier New" pitchFamily="34" charset="-120"/>
+              </a:rPr>
+              <a:t>i_qtde</a:t>
             </a:r>
             <a:r>
               <a:rPr lang="en-US" sz="950" dirty="0">
@@ -6655,62 +6712,18 @@
                 <a:ea typeface="Courier New" pitchFamily="34" charset="-122"/>
                 <a:cs typeface="Courier New" pitchFamily="34" charset="-120"/>
               </a:rPr>
-              <a:t>    </a:t>
-            </a:r>
-            <a:r>
-              <a:rPr lang="en-US" sz="950" dirty="0">
-                <a:solidFill>
-                  <a:srgbClr val="CCCCCC"/>
-                </a:solidFill>
-                <a:latin typeface="Courier New" pitchFamily="34" charset="0"/>
-                <a:ea typeface="Courier New" pitchFamily="34" charset="-122"/>
-                <a:cs typeface="Courier New" pitchFamily="34" charset="-120"/>
-              </a:rPr>
-              <a:t>carrier_id</a:t>
-            </a:r>
-            <a:r>
-              <a:rPr lang="en-US" sz="950" dirty="0">
-                <a:solidFill>
-                  <a:srgbClr val="CCCCCC"/>
-                </a:solidFill>
-                <a:latin typeface="Courier New" pitchFamily="34" charset="0"/>
-                <a:ea typeface="Courier New" pitchFamily="34" charset="-122"/>
-                <a:cs typeface="Courier New" pitchFamily="34" charset="-120"/>
-              </a:rPr>
-              <a:t>    </a:t>
-            </a:r>
-            <a:r>
-              <a:rPr lang="en-US" sz="950" dirty="0">
-                <a:solidFill>
-                  <a:srgbClr val="CCCCCC"/>
-                </a:solidFill>
-                <a:latin typeface="Courier New" pitchFamily="34" charset="0"/>
-                <a:ea typeface="Courier New" pitchFamily="34" charset="-122"/>
-                <a:cs typeface="Courier New" pitchFamily="34" charset="-120"/>
-              </a:rPr>
-              <a:t>=</a:t>
-            </a:r>
-            <a:r>
-              <a:rPr lang="en-US" sz="950" dirty="0">
-                <a:solidFill>
-                  <a:srgbClr val="CCCCCC"/>
-                </a:solidFill>
-                <a:latin typeface="Courier New" pitchFamily="34" charset="0"/>
-                <a:ea typeface="Courier New" pitchFamily="34" charset="-122"/>
-                <a:cs typeface="Courier New" pitchFamily="34" charset="-120"/>
-              </a:rPr>
-              <a:t> </a:t>
-            </a:r>
-            <a:r>
-              <a:rPr lang="en-US" sz="950" dirty="0">
-                <a:solidFill>
-                  <a:srgbClr val="CCCCCC"/>
-                </a:solidFill>
-                <a:latin typeface="Courier New" pitchFamily="34" charset="0"/>
-                <a:ea typeface="Courier New" pitchFamily="34" charset="-122"/>
-                <a:cs typeface="Courier New" pitchFamily="34" charset="-120"/>
-              </a:rPr>
-              <a:t>i_carrier_id</a:t>
+              <a:t>  </a:t>
+            </a:r>
+            <a:r>
+              <a:rPr lang="en-US" sz="950" dirty="0">
+                <a:solidFill>
+                  <a:srgbClr val="569CD6"/>
+                </a:solidFill>
+                <a:latin typeface="Courier New" pitchFamily="34" charset="0"/>
+                <a:ea typeface="Courier New" pitchFamily="34" charset="-122"/>
+                <a:cs typeface="Courier New" pitchFamily="34" charset="-120"/>
+              </a:rPr>
+              <a:t>ENDMETHOD</a:t>
             </a:r>
             <a:r>
               <a:rPr lang="en-US" sz="950" dirty="0">
@@ -6741,18 +6754,18 @@
                 <a:ea typeface="Courier New" pitchFamily="34" charset="-122"/>
                 <a:cs typeface="Courier New" pitchFamily="34" charset="-120"/>
               </a:rPr>
-              <a:t>    </a:t>
-            </a:r>
-            <a:r>
-              <a:rPr lang="en-US" sz="950" dirty="0">
-                <a:solidFill>
-                  <a:srgbClr val="CCCCCC"/>
-                </a:solidFill>
-                <a:latin typeface="Courier New" pitchFamily="34" charset="0"/>
-                <a:ea typeface="Courier New" pitchFamily="34" charset="-122"/>
-                <a:cs typeface="Courier New" pitchFamily="34" charset="-120"/>
-              </a:rPr>
-              <a:t>connection_id</a:t>
+              <a:t>  </a:t>
+            </a:r>
+            <a:r>
+              <a:rPr lang="en-US" sz="950" dirty="0">
+                <a:solidFill>
+                  <a:srgbClr val="569CD6"/>
+                </a:solidFill>
+                <a:latin typeface="Courier New" pitchFamily="34" charset="0"/>
+                <a:ea typeface="Courier New" pitchFamily="34" charset="-122"/>
+                <a:cs typeface="Courier New" pitchFamily="34" charset="-120"/>
+              </a:rPr>
+              <a:t>METHOD</a:t>
             </a:r>
             <a:r>
               <a:rPr lang="en-US" sz="950" dirty="0">
@@ -6774,29 +6787,7 @@
                 <a:ea typeface="Courier New" pitchFamily="34" charset="-122"/>
                 <a:cs typeface="Courier New" pitchFamily="34" charset="-120"/>
               </a:rPr>
-              <a:t>=</a:t>
-            </a:r>
-            <a:r>
-              <a:rPr lang="en-US" sz="950" dirty="0">
-                <a:solidFill>
-                  <a:srgbClr val="CCCCCC"/>
-                </a:solidFill>
-                <a:latin typeface="Courier New" pitchFamily="34" charset="0"/>
-                <a:ea typeface="Courier New" pitchFamily="34" charset="-122"/>
-                <a:cs typeface="Courier New" pitchFamily="34" charset="-120"/>
-              </a:rPr>
-              <a:t> </a:t>
-            </a:r>
-            <a:r>
-              <a:rPr lang="en-US" sz="950" dirty="0">
-                <a:solidFill>
-                  <a:srgbClr val="CCCCCC"/>
-                </a:solidFill>
-                <a:latin typeface="Courier New" pitchFamily="34" charset="0"/>
-                <a:ea typeface="Courier New" pitchFamily="34" charset="-122"/>
-                <a:cs typeface="Courier New" pitchFamily="34" charset="-120"/>
-              </a:rPr>
-              <a:t>i_connection_id</a:t>
+              <a:t>get_output</a:t>
             </a:r>
             <a:r>
               <a:rPr lang="en-US" sz="950" dirty="0">
@@ -6827,7 +6818,7 @@
                 <a:ea typeface="Courier New" pitchFamily="34" charset="-122"/>
                 <a:cs typeface="Courier New" pitchFamily="34" charset="-120"/>
               </a:rPr>
-              <a:t>  </a:t>
+              <a:t>    </a:t>
             </a:r>
             <a:r>
               <a:rPr lang="en-US" sz="950" dirty="0">
@@ -6838,18 +6829,29 @@
                 <a:ea typeface="Courier New" pitchFamily="34" charset="-122"/>
                 <a:cs typeface="Courier New" pitchFamily="34" charset="-120"/>
               </a:rPr>
-              <a:t>ENDMETHOD</a:t>
-            </a:r>
-            <a:r>
-              <a:rPr lang="en-US" sz="950" dirty="0">
-                <a:solidFill>
-                  <a:srgbClr val="CCCCCC"/>
-                </a:solidFill>
-                <a:latin typeface="Courier New" pitchFamily="34" charset="0"/>
-                <a:ea typeface="Courier New" pitchFamily="34" charset="-122"/>
-                <a:cs typeface="Courier New" pitchFamily="34" charset="-120"/>
-              </a:rPr>
-              <a:t>.</a:t>
+              <a:t>APPEND</a:t>
+            </a:r>
+            <a:r>
+              <a:rPr lang="en-US" sz="950" dirty="0">
+                <a:solidFill>
+                  <a:srgbClr val="CCCCCC"/>
+                </a:solidFill>
+                <a:latin typeface="Courier New" pitchFamily="34" charset="0"/>
+                <a:ea typeface="Courier New" pitchFamily="34" charset="-122"/>
+                <a:cs typeface="Courier New" pitchFamily="34" charset="-120"/>
+              </a:rPr>
+              <a:t> </a:t>
+            </a:r>
+            <a:r>
+              <a:rPr lang="en-US" sz="950" dirty="0">
+                <a:solidFill>
+                  <a:srgbClr val="CE9178"/>
+                </a:solidFill>
+                <a:latin typeface="Courier New" pitchFamily="34" charset="0"/>
+                <a:ea typeface="Courier New" pitchFamily="34" charset="-122"/>
+                <a:cs typeface="Courier New" pitchFamily="34" charset="-120"/>
+              </a:rPr>
+              <a:t>|{ sku }: { qtde_estoque - qtde_reservada } disponíveis|</a:t>
             </a:r>
             <a:endParaRPr lang="en-US" sz="950" dirty="0"/>
           </a:p>
@@ -6869,115 +6871,7 @@
                 <a:ea typeface="Courier New" pitchFamily="34" charset="-122"/>
                 <a:cs typeface="Courier New" pitchFamily="34" charset="-120"/>
               </a:rPr>
-              <a:t>  </a:t>
-            </a:r>
-            <a:r>
-              <a:rPr lang="en-US" sz="950" dirty="0">
-                <a:solidFill>
-                  <a:srgbClr val="569CD6"/>
-                </a:solidFill>
-                <a:latin typeface="Courier New" pitchFamily="34" charset="0"/>
-                <a:ea typeface="Courier New" pitchFamily="34" charset="-122"/>
-                <a:cs typeface="Courier New" pitchFamily="34" charset="-120"/>
-              </a:rPr>
-              <a:t>METHOD</a:t>
-            </a:r>
-            <a:r>
-              <a:rPr lang="en-US" sz="950" dirty="0">
-                <a:solidFill>
-                  <a:srgbClr val="CCCCCC"/>
-                </a:solidFill>
-                <a:latin typeface="Courier New" pitchFamily="34" charset="0"/>
-                <a:ea typeface="Courier New" pitchFamily="34" charset="-122"/>
-                <a:cs typeface="Courier New" pitchFamily="34" charset="-120"/>
-              </a:rPr>
-              <a:t> </a:t>
-            </a:r>
-            <a:r>
-              <a:rPr lang="en-US" sz="950" dirty="0">
-                <a:solidFill>
-                  <a:srgbClr val="CCCCCC"/>
-                </a:solidFill>
-                <a:latin typeface="Courier New" pitchFamily="34" charset="0"/>
-                <a:ea typeface="Courier New" pitchFamily="34" charset="-122"/>
-                <a:cs typeface="Courier New" pitchFamily="34" charset="-120"/>
-              </a:rPr>
-              <a:t>get_output</a:t>
-            </a:r>
-            <a:r>
-              <a:rPr lang="en-US" sz="950" dirty="0">
-                <a:solidFill>
-                  <a:srgbClr val="CCCCCC"/>
-                </a:solidFill>
-                <a:latin typeface="Courier New" pitchFamily="34" charset="0"/>
-                <a:ea typeface="Courier New" pitchFamily="34" charset="-122"/>
-                <a:cs typeface="Courier New" pitchFamily="34" charset="-120"/>
-              </a:rPr>
-              <a:t>.</a:t>
-            </a:r>
-            <a:endParaRPr lang="en-US" sz="950" dirty="0"/>
-          </a:p>
-          <a:p>
-            <a:pPr indent="0" marL="0">
-              <a:lnSpc>
-                <a:spcPct val="105000"/>
-              </a:lnSpc>
-              <a:buNone/>
-            </a:pPr>
-            <a:r>
-              <a:rPr lang="en-US" sz="950" dirty="0">
-                <a:solidFill>
-                  <a:srgbClr val="CCCCCC"/>
-                </a:solidFill>
-                <a:latin typeface="Courier New" pitchFamily="34" charset="0"/>
-                <a:ea typeface="Courier New" pitchFamily="34" charset="-122"/>
-                <a:cs typeface="Courier New" pitchFamily="34" charset="-120"/>
-              </a:rPr>
-              <a:t>    </a:t>
-            </a:r>
-            <a:r>
-              <a:rPr lang="en-US" sz="950" dirty="0">
-                <a:solidFill>
-                  <a:srgbClr val="569CD6"/>
-                </a:solidFill>
-                <a:latin typeface="Courier New" pitchFamily="34" charset="0"/>
-                <a:ea typeface="Courier New" pitchFamily="34" charset="-122"/>
-                <a:cs typeface="Courier New" pitchFamily="34" charset="-120"/>
-              </a:rPr>
-              <a:t>APPEND</a:t>
-            </a:r>
-            <a:r>
-              <a:rPr lang="en-US" sz="950" dirty="0">
-                <a:solidFill>
-                  <a:srgbClr val="CCCCCC"/>
-                </a:solidFill>
-                <a:latin typeface="Courier New" pitchFamily="34" charset="0"/>
-                <a:ea typeface="Courier New" pitchFamily="34" charset="-122"/>
-                <a:cs typeface="Courier New" pitchFamily="34" charset="-120"/>
-              </a:rPr>
-              <a:t> </a:t>
-            </a:r>
-            <a:r>
-              <a:rPr lang="en-US" sz="950" dirty="0">
-                <a:solidFill>
-                  <a:srgbClr val="CE9178"/>
-                </a:solidFill>
-                <a:latin typeface="Courier New" pitchFamily="34" charset="0"/>
-                <a:ea typeface="Courier New" pitchFamily="34" charset="-122"/>
-                <a:cs typeface="Courier New" pitchFamily="34" charset="-120"/>
-              </a:rPr>
-              <a:t>|Voo { carrier_id } { connection_id }|</a:t>
-            </a:r>
-            <a:r>
-              <a:rPr lang="en-US" sz="950" dirty="0">
-                <a:solidFill>
-                  <a:srgbClr val="CCCCCC"/>
-                </a:solidFill>
-                <a:latin typeface="Courier New" pitchFamily="34" charset="0"/>
-                <a:ea typeface="Courier New" pitchFamily="34" charset="-122"/>
-                <a:cs typeface="Courier New" pitchFamily="34" charset="-120"/>
-              </a:rPr>
-              <a:t> </a:t>
+              <a:t>      </a:t>
             </a:r>
             <a:r>
               <a:rPr lang="en-US" sz="950" dirty="0">
@@ -7226,7 +7120,7 @@
                 <a:ea typeface="Courier New" pitchFamily="34" charset="-122"/>
                 <a:cs typeface="Courier New" pitchFamily="34" charset="-120"/>
               </a:rPr>
-              <a:t>DEFAULT 'LH'</a:t>
+              <a:t>DEFAULT 1</a:t>
             </a:r>
             <a:endParaRPr lang="en-US" sz="1400" dirty="0"/>
           </a:p>
@@ -7240,7 +7134,26 @@
                   <a:srgbClr val="556B82"/>
                 </a:solidFill>
               </a:rPr>
-              <a:t>Torna o parâmetro opcional com um valor padrão.</a:t>
+              <a:t>Torna o parâmetro opcional com um valor padrão. A regra é a da action </a:t>
+            </a:r>
+            <a:r>
+              <a:rPr lang="en-US" sz="1050" dirty="0">
+                <a:solidFill>
+                  <a:srgbClr val="0064D9"/>
+                </a:solidFill>
+                <a:latin typeface="Courier New" pitchFamily="34" charset="0"/>
+                <a:ea typeface="Courier New" pitchFamily="34" charset="-122"/>
+                <a:cs typeface="Courier New" pitchFamily="34" charset="-120"/>
+              </a:rPr>
+              <a:t>ReservarEstoque</a:t>
+            </a:r>
+            <a:r>
+              <a:rPr lang="en-US" sz="1050" dirty="0">
+                <a:solidFill>
+                  <a:srgbClr val="556B82"/>
+                </a:solidFill>
+              </a:rPr>
+              <a:t> do BO Item.</a:t>
             </a:r>
             <a:endParaRPr lang="en-US" sz="1400" dirty="0"/>
           </a:p>
@@ -8094,26 +8007,6 @@
             </a:r>
             <a:endParaRPr lang="en-US" sz="1050" dirty="0"/>
           </a:p>
-          <a:p>
-            <a:pPr algn="r" indent="0" marL="0">
-              <a:lnSpc>
-                <a:spcPct val="105000"/>
-              </a:lnSpc>
-              <a:buNone/>
-            </a:pPr>
-            <a:r>
-              <a:rPr lang="en-US" sz="1050" dirty="0">
-                <a:solidFill>
-                  <a:srgbClr val="6E7681"/>
-                </a:solidFill>
-                <a:latin typeface="Courier New" pitchFamily="34" charset="0"/>
-                <a:ea typeface="Courier New" pitchFamily="34" charset="-122"/>
-                <a:cs typeface="Courier New" pitchFamily="34" charset="-120"/>
-              </a:rPr>
-              <a:t>7</a:t>
-            </a:r>
-            <a:endParaRPr lang="en-US" sz="1050" dirty="0"/>
-          </a:p>
         </p:txBody>
       </p:sp>
       <p:sp>
@@ -8194,7 +8087,7 @@
                 <a:ea typeface="Courier New" pitchFamily="34" charset="-122"/>
                 <a:cs typeface="Courier New" pitchFamily="34" charset="-120"/>
               </a:rPr>
-              <a:t>connection-</a:t>
+              <a:t>item-</a:t>
             </a:r>
             <a:r>
               <a:rPr lang="en-US" sz="1050" dirty="0">
@@ -8216,7 +8109,7 @@
                 <a:ea typeface="Courier New" pitchFamily="34" charset="-122"/>
                 <a:cs typeface="Courier New" pitchFamily="34" charset="-120"/>
               </a:rPr>
-              <a:t>set_attributes</a:t>
+              <a:t>reservar</a:t>
             </a:r>
             <a:r>
               <a:rPr lang="en-US" sz="1050" dirty="0">
@@ -8228,6 +8121,105 @@
                 <a:cs typeface="Courier New" pitchFamily="34" charset="-120"/>
               </a:rPr>
               <a:t>(</a:t>
+            </a:r>
+            <a:r>
+              <a:rPr lang="en-US" sz="1050" dirty="0">
+                <a:solidFill>
+                  <a:srgbClr val="CCCCCC"/>
+                </a:solidFill>
+                <a:latin typeface="Courier New" pitchFamily="34" charset="0"/>
+                <a:ea typeface="Courier New" pitchFamily="34" charset="-122"/>
+                <a:cs typeface="Courier New" pitchFamily="34" charset="-120"/>
+              </a:rPr>
+              <a:t> </a:t>
+            </a:r>
+            <a:r>
+              <a:rPr lang="en-US" sz="1050" dirty="0">
+                <a:solidFill>
+                  <a:srgbClr val="CCCCCC"/>
+                </a:solidFill>
+                <a:latin typeface="Courier New" pitchFamily="34" charset="0"/>
+                <a:ea typeface="Courier New" pitchFamily="34" charset="-122"/>
+                <a:cs typeface="Courier New" pitchFamily="34" charset="-120"/>
+              </a:rPr>
+              <a:t>i_qtde</a:t>
+            </a:r>
+            <a:r>
+              <a:rPr lang="en-US" sz="1050" dirty="0">
+                <a:solidFill>
+                  <a:srgbClr val="CCCCCC"/>
+                </a:solidFill>
+                <a:latin typeface="Courier New" pitchFamily="34" charset="0"/>
+                <a:ea typeface="Courier New" pitchFamily="34" charset="-122"/>
+                <a:cs typeface="Courier New" pitchFamily="34" charset="-120"/>
+              </a:rPr>
+              <a:t> </a:t>
+            </a:r>
+            <a:r>
+              <a:rPr lang="en-US" sz="1050" dirty="0">
+                <a:solidFill>
+                  <a:srgbClr val="CCCCCC"/>
+                </a:solidFill>
+                <a:latin typeface="Courier New" pitchFamily="34" charset="0"/>
+                <a:ea typeface="Courier New" pitchFamily="34" charset="-122"/>
+                <a:cs typeface="Courier New" pitchFamily="34" charset="-120"/>
+              </a:rPr>
+              <a:t>=</a:t>
+            </a:r>
+            <a:r>
+              <a:rPr lang="en-US" sz="1050" dirty="0">
+                <a:solidFill>
+                  <a:srgbClr val="CCCCCC"/>
+                </a:solidFill>
+                <a:latin typeface="Courier New" pitchFamily="34" charset="0"/>
+                <a:ea typeface="Courier New" pitchFamily="34" charset="-122"/>
+                <a:cs typeface="Courier New" pitchFamily="34" charset="-120"/>
+              </a:rPr>
+              <a:t> </a:t>
+            </a:r>
+            <a:r>
+              <a:rPr lang="en-US" sz="1050" dirty="0">
+                <a:solidFill>
+                  <a:srgbClr val="B5CEA8"/>
+                </a:solidFill>
+                <a:latin typeface="Courier New" pitchFamily="34" charset="0"/>
+                <a:ea typeface="Courier New" pitchFamily="34" charset="-122"/>
+                <a:cs typeface="Courier New" pitchFamily="34" charset="-120"/>
+              </a:rPr>
+              <a:t>3</a:t>
+            </a:r>
+            <a:r>
+              <a:rPr lang="en-US" sz="1050" dirty="0">
+                <a:solidFill>
+                  <a:srgbClr val="CCCCCC"/>
+                </a:solidFill>
+                <a:latin typeface="Courier New" pitchFamily="34" charset="0"/>
+                <a:ea typeface="Courier New" pitchFamily="34" charset="-122"/>
+                <a:cs typeface="Courier New" pitchFamily="34" charset="-120"/>
+              </a:rPr>
+              <a:t> </a:t>
+            </a:r>
+            <a:r>
+              <a:rPr lang="en-US" sz="1050" dirty="0">
+                <a:solidFill>
+                  <a:srgbClr val="CCCCCC"/>
+                </a:solidFill>
+                <a:latin typeface="Courier New" pitchFamily="34" charset="0"/>
+                <a:ea typeface="Courier New" pitchFamily="34" charset="-122"/>
+                <a:cs typeface="Courier New" pitchFamily="34" charset="-120"/>
+              </a:rPr>
+              <a:t>)</a:t>
+            </a:r>
+            <a:r>
+              <a:rPr lang="en-US" sz="1050" dirty="0">
+                <a:solidFill>
+                  <a:srgbClr val="CCCCCC"/>
+                </a:solidFill>
+                <a:latin typeface="Courier New" pitchFamily="34" charset="0"/>
+                <a:ea typeface="Courier New" pitchFamily="34" charset="-122"/>
+                <a:cs typeface="Courier New" pitchFamily="34" charset="-120"/>
+              </a:rPr>
+              <a:t>.</a:t>
             </a:r>
             <a:endParaRPr lang="en-US" sz="1050" dirty="0"/>
           </a:p>
@@ -8247,28 +8239,6 @@
                 <a:ea typeface="Courier New" pitchFamily="34" charset="-122"/>
                 <a:cs typeface="Courier New" pitchFamily="34" charset="-120"/>
               </a:rPr>
-              <a:t>      </a:t>
-            </a:r>
-            <a:r>
-              <a:rPr lang="en-US" sz="1050" dirty="0">
-                <a:solidFill>
-                  <a:srgbClr val="CCCCCC"/>
-                </a:solidFill>
-                <a:latin typeface="Courier New" pitchFamily="34" charset="0"/>
-                <a:ea typeface="Courier New" pitchFamily="34" charset="-122"/>
-                <a:cs typeface="Courier New" pitchFamily="34" charset="-120"/>
-              </a:rPr>
-              <a:t>i_carrier_id</a:t>
-            </a:r>
-            <a:r>
-              <a:rPr lang="en-US" sz="1050" dirty="0">
-                <a:solidFill>
-                  <a:srgbClr val="CCCCCC"/>
-                </a:solidFill>
-                <a:latin typeface="Courier New" pitchFamily="34" charset="0"/>
-                <a:ea typeface="Courier New" pitchFamily="34" charset="-122"/>
-                <a:cs typeface="Courier New" pitchFamily="34" charset="-120"/>
-              </a:rPr>
               <a:t>    </a:t>
             </a:r>
             <a:r>
@@ -8280,7 +8250,40 @@
                 <a:ea typeface="Courier New" pitchFamily="34" charset="-122"/>
                 <a:cs typeface="Courier New" pitchFamily="34" charset="-120"/>
               </a:rPr>
-              <a:t>=</a:t>
+              <a:t>item-</a:t>
+            </a:r>
+            <a:r>
+              <a:rPr lang="en-US" sz="1050" dirty="0">
+                <a:solidFill>
+                  <a:srgbClr val="CCCCCC"/>
+                </a:solidFill>
+                <a:latin typeface="Courier New" pitchFamily="34" charset="0"/>
+                <a:ea typeface="Courier New" pitchFamily="34" charset="-122"/>
+                <a:cs typeface="Courier New" pitchFamily="34" charset="-120"/>
+              </a:rPr>
+              <a:t>&gt;</a:t>
+            </a:r>
+            <a:r>
+              <a:rPr lang="en-US" sz="1050" dirty="0">
+                <a:solidFill>
+                  <a:srgbClr val="CCCCCC"/>
+                </a:solidFill>
+                <a:latin typeface="Courier New" pitchFamily="34" charset="0"/>
+                <a:ea typeface="Courier New" pitchFamily="34" charset="-122"/>
+                <a:cs typeface="Courier New" pitchFamily="34" charset="-120"/>
+              </a:rPr>
+              <a:t>reservar</a:t>
+            </a:r>
+            <a:r>
+              <a:rPr lang="en-US" sz="1050" dirty="0">
+                <a:solidFill>
+                  <a:srgbClr val="CCCCCC"/>
+                </a:solidFill>
+                <a:latin typeface="Courier New" pitchFamily="34" charset="0"/>
+                <a:ea typeface="Courier New" pitchFamily="34" charset="-122"/>
+                <a:cs typeface="Courier New" pitchFamily="34" charset="-120"/>
+              </a:rPr>
+              <a:t>(</a:t>
             </a:r>
             <a:r>
               <a:rPr lang="en-US" sz="1050" dirty="0">
@@ -8296,13 +8299,46 @@
             <a:r>
               <a:rPr lang="en-US" sz="1050" dirty="0">
                 <a:solidFill>
-                  <a:srgbClr val="CE9178"/>
-                </a:solidFill>
-                <a:latin typeface="Courier New" pitchFamily="34" charset="0"/>
-                <a:ea typeface="Courier New" pitchFamily="34" charset="-122"/>
-                <a:cs typeface="Courier New" pitchFamily="34" charset="-120"/>
-              </a:rPr>
-              <a:t>'LH'</a:t>
+                  <a:srgbClr val="CCCCCC"/>
+                </a:solidFill>
+                <a:latin typeface="Courier New" pitchFamily="34" charset="0"/>
+                <a:ea typeface="Courier New" pitchFamily="34" charset="-122"/>
+                <a:cs typeface="Courier New" pitchFamily="34" charset="-120"/>
+              </a:rPr>
+              <a:t>)</a:t>
+            </a:r>
+            <a:r>
+              <a:rPr lang="en-US" sz="1050" dirty="0">
+                <a:solidFill>
+                  <a:srgbClr val="CCCCCC"/>
+                </a:solidFill>
+                <a:latin typeface="Courier New" pitchFamily="34" charset="0"/>
+                <a:ea typeface="Courier New" pitchFamily="34" charset="-122"/>
+                <a:cs typeface="Courier New" pitchFamily="34" charset="-120"/>
+              </a:rPr>
+              <a:t>.</a:t>
+            </a:r>
+            <a:r>
+              <a:rPr lang="en-US" sz="1050" dirty="0">
+                <a:solidFill>
+                  <a:srgbClr val="CCCCCC"/>
+                </a:solidFill>
+                <a:latin typeface="Courier New" pitchFamily="34" charset="0"/>
+                <a:ea typeface="Courier New" pitchFamily="34" charset="-122"/>
+                <a:cs typeface="Courier New" pitchFamily="34" charset="-120"/>
+              </a:rPr>
+              <a:t>         </a:t>
+            </a:r>
+            <a:r>
+              <a:rPr lang="en-US" sz="1050" i="1" dirty="0">
+                <a:solidFill>
+                  <a:srgbClr val="6A9955"/>
+                </a:solidFill>
+                <a:latin typeface="Courier New" pitchFamily="34" charset="0"/>
+                <a:ea typeface="Courier New" pitchFamily="34" charset="-122"/>
+                <a:cs typeface="Courier New" pitchFamily="34" charset="-120"/>
+              </a:rPr>
+              <a:t>" DEFAULT 1</a:t>
             </a:r>
             <a:endParaRPr lang="en-US" sz="1050" dirty="0"/>
           </a:p>
@@ -8322,18 +8358,18 @@
                 <a:ea typeface="Courier New" pitchFamily="34" charset="-122"/>
                 <a:cs typeface="Courier New" pitchFamily="34" charset="-120"/>
               </a:rPr>
-              <a:t>      </a:t>
-            </a:r>
-            <a:r>
-              <a:rPr lang="en-US" sz="1050" dirty="0">
-                <a:solidFill>
-                  <a:srgbClr val="CCCCCC"/>
-                </a:solidFill>
-                <a:latin typeface="Courier New" pitchFamily="34" charset="0"/>
-                <a:ea typeface="Courier New" pitchFamily="34" charset="-122"/>
-                <a:cs typeface="Courier New" pitchFamily="34" charset="-120"/>
-              </a:rPr>
-              <a:t>i_connection_id</a:t>
+              <a:t>  </a:t>
+            </a:r>
+            <a:r>
+              <a:rPr lang="en-US" sz="1050" dirty="0">
+                <a:solidFill>
+                  <a:srgbClr val="569CD6"/>
+                </a:solidFill>
+                <a:latin typeface="Courier New" pitchFamily="34" charset="0"/>
+                <a:ea typeface="Courier New" pitchFamily="34" charset="-122"/>
+                <a:cs typeface="Courier New" pitchFamily="34" charset="-120"/>
+              </a:rPr>
+              <a:t>CATCH</a:t>
             </a:r>
             <a:r>
               <a:rPr lang="en-US" sz="1050" dirty="0">
@@ -8349,57 +8385,13 @@
             <a:r>
               <a:rPr lang="en-US" sz="1050" dirty="0">
                 <a:solidFill>
-                  <a:srgbClr val="CCCCCC"/>
-                </a:solidFill>
-                <a:latin typeface="Courier New" pitchFamily="34" charset="0"/>
-                <a:ea typeface="Courier New" pitchFamily="34" charset="-122"/>
-                <a:cs typeface="Courier New" pitchFamily="34" charset="-120"/>
-              </a:rPr>
-              <a:t>=</a:t>
-            </a:r>
-            <a:r>
-              <a:rPr lang="en-US" sz="1050" dirty="0">
-                <a:solidFill>
-                  <a:srgbClr val="CCCCCC"/>
-                </a:solidFill>
-                <a:latin typeface="Courier New" pitchFamily="34" charset="0"/>
-                <a:ea typeface="Courier New" pitchFamily="34" charset="-122"/>
-                <a:cs typeface="Courier New" pitchFamily="34" charset="-120"/>
-              </a:rPr>
-              <a:t> </a:t>
-            </a:r>
-            <a:r>
-              <a:rPr lang="en-US" sz="1050" dirty="0">
-                <a:solidFill>
-                  <a:srgbClr val="CE9178"/>
-                </a:solidFill>
-                <a:latin typeface="Courier New" pitchFamily="34" charset="0"/>
-                <a:ea typeface="Courier New" pitchFamily="34" charset="-122"/>
-                <a:cs typeface="Courier New" pitchFamily="34" charset="-120"/>
-              </a:rPr>
-              <a:t>'0400'</a:t>
-            </a:r>
-            <a:r>
-              <a:rPr lang="en-US" sz="1050" dirty="0">
-                <a:solidFill>
-                  <a:srgbClr val="CCCCCC"/>
-                </a:solidFill>
-                <a:latin typeface="Courier New" pitchFamily="34" charset="0"/>
-                <a:ea typeface="Courier New" pitchFamily="34" charset="-122"/>
-                <a:cs typeface="Courier New" pitchFamily="34" charset="-120"/>
-              </a:rPr>
-              <a:t> </a:t>
-            </a:r>
-            <a:r>
-              <a:rPr lang="en-US" sz="1050" dirty="0">
-                <a:solidFill>
-                  <a:srgbClr val="CCCCCC"/>
-                </a:solidFill>
-                <a:latin typeface="Courier New" pitchFamily="34" charset="0"/>
-                <a:ea typeface="Courier New" pitchFamily="34" charset="-122"/>
-                <a:cs typeface="Courier New" pitchFamily="34" charset="-120"/>
-              </a:rPr>
-              <a:t>)</a:t>
+                  <a:srgbClr val="4EC9B0"/>
+                </a:solidFill>
+                <a:latin typeface="Courier New" pitchFamily="34" charset="0"/>
+                <a:ea typeface="Courier New" pitchFamily="34" charset="-122"/>
+                <a:cs typeface="Courier New" pitchFamily="34" charset="-120"/>
+              </a:rPr>
+              <a:t>cx_abap_invalid_value</a:t>
             </a:r>
             <a:r>
               <a:rPr lang="en-US" sz="1050" dirty="0">
@@ -8430,18 +8422,51 @@
                 <a:ea typeface="Courier New" pitchFamily="34" charset="-122"/>
                 <a:cs typeface="Courier New" pitchFamily="34" charset="-120"/>
               </a:rPr>
-              <a:t>  </a:t>
-            </a:r>
-            <a:r>
-              <a:rPr lang="en-US" sz="1050" dirty="0">
-                <a:solidFill>
-                  <a:srgbClr val="569CD6"/>
-                </a:solidFill>
-                <a:latin typeface="Courier New" pitchFamily="34" charset="0"/>
-                <a:ea typeface="Courier New" pitchFamily="34" charset="-122"/>
-                <a:cs typeface="Courier New" pitchFamily="34" charset="-120"/>
-              </a:rPr>
-              <a:t>CATCH</a:t>
+              <a:t>    </a:t>
+            </a:r>
+            <a:r>
+              <a:rPr lang="en-US" sz="1050" dirty="0">
+                <a:solidFill>
+                  <a:srgbClr val="CCCCCC"/>
+                </a:solidFill>
+                <a:latin typeface="Courier New" pitchFamily="34" charset="0"/>
+                <a:ea typeface="Courier New" pitchFamily="34" charset="-122"/>
+                <a:cs typeface="Courier New" pitchFamily="34" charset="-120"/>
+              </a:rPr>
+              <a:t>out-</a:t>
+            </a:r>
+            <a:r>
+              <a:rPr lang="en-US" sz="1050" dirty="0">
+                <a:solidFill>
+                  <a:srgbClr val="CCCCCC"/>
+                </a:solidFill>
+                <a:latin typeface="Courier New" pitchFamily="34" charset="0"/>
+                <a:ea typeface="Courier New" pitchFamily="34" charset="-122"/>
+                <a:cs typeface="Courier New" pitchFamily="34" charset="-120"/>
+              </a:rPr>
+              <a:t>&gt;</a:t>
+            </a:r>
+            <a:r>
+              <a:rPr lang="en-US" sz="1050" dirty="0">
+                <a:solidFill>
+                  <a:srgbClr val="CCCCCC"/>
+                </a:solidFill>
+                <a:latin typeface="Courier New" pitchFamily="34" charset="0"/>
+                <a:ea typeface="Courier New" pitchFamily="34" charset="-122"/>
+                <a:cs typeface="Courier New" pitchFamily="34" charset="-120"/>
+              </a:rPr>
+              <a:t>write</a:t>
+            </a:r>
+            <a:r>
+              <a:rPr lang="en-US" sz="1050" dirty="0">
+                <a:solidFill>
+                  <a:srgbClr val="CCCCCC"/>
+                </a:solidFill>
+                <a:latin typeface="Courier New" pitchFamily="34" charset="0"/>
+                <a:ea typeface="Courier New" pitchFamily="34" charset="-122"/>
+                <a:cs typeface="Courier New" pitchFamily="34" charset="-120"/>
+              </a:rPr>
+              <a:t>(</a:t>
             </a:r>
             <a:r>
               <a:rPr lang="en-US" sz="1050" dirty="0">
@@ -8457,110 +8482,13 @@
             <a:r>
               <a:rPr lang="en-US" sz="1050" dirty="0">
                 <a:solidFill>
-                  <a:srgbClr val="4EC9B0"/>
-                </a:solidFill>
-                <a:latin typeface="Courier New" pitchFamily="34" charset="0"/>
-                <a:ea typeface="Courier New" pitchFamily="34" charset="-122"/>
-                <a:cs typeface="Courier New" pitchFamily="34" charset="-120"/>
-              </a:rPr>
-              <a:t>cx_abap_invalid_value</a:t>
-            </a:r>
-            <a:r>
-              <a:rPr lang="en-US" sz="1050" dirty="0">
-                <a:solidFill>
-                  <a:srgbClr val="CCCCCC"/>
-                </a:solidFill>
-                <a:latin typeface="Courier New" pitchFamily="34" charset="0"/>
-                <a:ea typeface="Courier New" pitchFamily="34" charset="-122"/>
-                <a:cs typeface="Courier New" pitchFamily="34" charset="-120"/>
-              </a:rPr>
-              <a:t>.</a:t>
-            </a:r>
-            <a:endParaRPr lang="en-US" sz="1050" dirty="0"/>
-          </a:p>
-          <a:p>
-            <a:pPr indent="0" marL="0">
-              <a:lnSpc>
-                <a:spcPct val="105000"/>
-              </a:lnSpc>
-              <a:buNone/>
-            </a:pPr>
-            <a:r>
-              <a:rPr lang="en-US" sz="1050" dirty="0">
-                <a:solidFill>
-                  <a:srgbClr val="CCCCCC"/>
-                </a:solidFill>
-                <a:latin typeface="Courier New" pitchFamily="34" charset="0"/>
-                <a:ea typeface="Courier New" pitchFamily="34" charset="-122"/>
-                <a:cs typeface="Courier New" pitchFamily="34" charset="-120"/>
-              </a:rPr>
-              <a:t>    </a:t>
-            </a:r>
-            <a:r>
-              <a:rPr lang="en-US" sz="1050" dirty="0">
-                <a:solidFill>
-                  <a:srgbClr val="CCCCCC"/>
-                </a:solidFill>
-                <a:latin typeface="Courier New" pitchFamily="34" charset="0"/>
-                <a:ea typeface="Courier New" pitchFamily="34" charset="-122"/>
-                <a:cs typeface="Courier New" pitchFamily="34" charset="-120"/>
-              </a:rPr>
-              <a:t>out-</a:t>
-            </a:r>
-            <a:r>
-              <a:rPr lang="en-US" sz="1050" dirty="0">
-                <a:solidFill>
-                  <a:srgbClr val="CCCCCC"/>
-                </a:solidFill>
-                <a:latin typeface="Courier New" pitchFamily="34" charset="0"/>
-                <a:ea typeface="Courier New" pitchFamily="34" charset="-122"/>
-                <a:cs typeface="Courier New" pitchFamily="34" charset="-120"/>
-              </a:rPr>
-              <a:t>&gt;</a:t>
-            </a:r>
-            <a:r>
-              <a:rPr lang="en-US" sz="1050" dirty="0">
-                <a:solidFill>
-                  <a:srgbClr val="CCCCCC"/>
-                </a:solidFill>
-                <a:latin typeface="Courier New" pitchFamily="34" charset="0"/>
-                <a:ea typeface="Courier New" pitchFamily="34" charset="-122"/>
-                <a:cs typeface="Courier New" pitchFamily="34" charset="-120"/>
-              </a:rPr>
-              <a:t>write</a:t>
-            </a:r>
-            <a:r>
-              <a:rPr lang="en-US" sz="1050" dirty="0">
-                <a:solidFill>
-                  <a:srgbClr val="CCCCCC"/>
-                </a:solidFill>
-                <a:latin typeface="Courier New" pitchFamily="34" charset="0"/>
-                <a:ea typeface="Courier New" pitchFamily="34" charset="-122"/>
-                <a:cs typeface="Courier New" pitchFamily="34" charset="-120"/>
-              </a:rPr>
-              <a:t>(</a:t>
-            </a:r>
-            <a:r>
-              <a:rPr lang="en-US" sz="1050" dirty="0">
-                <a:solidFill>
-                  <a:srgbClr val="CCCCCC"/>
-                </a:solidFill>
-                <a:latin typeface="Courier New" pitchFamily="34" charset="0"/>
-                <a:ea typeface="Courier New" pitchFamily="34" charset="-122"/>
-                <a:cs typeface="Courier New" pitchFamily="34" charset="-120"/>
-              </a:rPr>
-              <a:t> </a:t>
-            </a:r>
-            <a:r>
-              <a:rPr lang="en-US" sz="1050" dirty="0">
-                <a:solidFill>
                   <a:srgbClr val="CE9178"/>
                 </a:solidFill>
                 <a:latin typeface="Courier New" pitchFamily="34" charset="0"/>
                 <a:ea typeface="Courier New" pitchFamily="34" charset="-122"/>
                 <a:cs typeface="Courier New" pitchFamily="34" charset="-120"/>
               </a:rPr>
-              <a:t>`Dados inválidos`</a:t>
+              <a:t>`Estoque insuficiente`</a:t>
             </a:r>
             <a:r>
               <a:rPr lang="en-US" sz="1050" dirty="0">
@@ -9141,7 +9069,7 @@
                 <a:ea typeface="Courier New" pitchFamily="34" charset="-122"/>
                 <a:cs typeface="Courier New" pitchFamily="34" charset="-120"/>
               </a:rPr>
-              <a:t>connection-</a:t>
+              <a:t>item-</a:t>
             </a:r>
             <a:r>
               <a:rPr lang="en-US" sz="1050" dirty="0">
@@ -9346,7 +9274,7 @@
                 <a:ea typeface="Courier New" pitchFamily="34" charset="-122"/>
                 <a:cs typeface="Courier New" pitchFamily="34" charset="-120"/>
               </a:rPr>
-              <a:t>connection-</a:t>
+              <a:t>item-</a:t>
             </a:r>
             <a:r>
               <a:rPr lang="en-US" sz="1050" dirty="0">
@@ -9527,18 +9455,18 @@
                 <a:ea typeface="Courier New" pitchFamily="34" charset="-122"/>
                 <a:cs typeface="Courier New" pitchFamily="34" charset="-120"/>
               </a:rPr>
-              <a:t>lcl_connection=&gt;</a:t>
-            </a:r>
-            <a:r>
-              <a:rPr lang="en-US" sz="1050" dirty="0">
-                <a:solidFill>
-                  <a:srgbClr val="CCCCCC"/>
-                </a:solidFill>
-                <a:latin typeface="Courier New" pitchFamily="34" charset="0"/>
-                <a:ea typeface="Courier New" pitchFamily="34" charset="-122"/>
-                <a:cs typeface="Courier New" pitchFamily="34" charset="-120"/>
-              </a:rPr>
-              <a:t>conn_counter</a:t>
+              <a:t>lcl_item=&gt;</a:t>
+            </a:r>
+            <a:r>
+              <a:rPr lang="en-US" sz="1050" dirty="0">
+                <a:solidFill>
+                  <a:srgbClr val="CCCCCC"/>
+                </a:solidFill>
+                <a:latin typeface="Courier New" pitchFamily="34" charset="0"/>
+                <a:ea typeface="Courier New" pitchFamily="34" charset="-122"/>
+                <a:cs typeface="Courier New" pitchFamily="34" charset="-120"/>
+              </a:rPr>
+              <a:t>item_counter</a:t>
             </a:r>
             <a:r>
               <a:rPr lang="en-US" sz="1050" dirty="0">
@@ -10376,7 +10304,7 @@
                 <a:ea typeface="Courier New" pitchFamily="34" charset="-122"/>
                 <a:cs typeface="Courier New" pitchFamily="34" charset="-120"/>
               </a:rPr>
-              <a:t>connection-&gt;carrier_id = 'XX'</a:t>
+              <a:t>item-&gt;qtde_estoque = -5</a:t>
             </a:r>
             <a:r>
               <a:rPr lang="en-US" sz="1350" dirty="0">
@@ -10402,7 +10330,7 @@
                   <a:srgbClr val="1D2D3E"/>
                 </a:solidFill>
               </a:rPr>
-              <a:t>Combinações de companhia e voo que não existem chegam ao objeto</a:t>
+              <a:t>Reservas maiores que o saldo disponível chegam ao objeto</a:t>
             </a:r>
             <a:endParaRPr lang="en-US" sz="1400" dirty="0"/>
           </a:p>
@@ -11045,7 +10973,7 @@
         <p:spPr>
           <a:xfrm>
             <a:off x="640080" y="1700784"/>
-            <a:ext cx="2852928" cy="292608"/>
+            <a:ext cx="3474720" cy="292608"/>
           </a:xfrm>
           <a:prstGeom prst="rect">
             <a:avLst/>
@@ -11065,7 +10993,7 @@
         <p:spPr>
           <a:xfrm>
             <a:off x="640080" y="1700784"/>
-            <a:ext cx="2852928" cy="27432"/>
+            <a:ext cx="3474720" cy="27432"/>
           </a:xfrm>
           <a:prstGeom prst="rect">
             <a:avLst/>
@@ -11085,7 +11013,7 @@
         <p:spPr>
           <a:xfrm>
             <a:off x="731520" y="1719072"/>
-            <a:ext cx="2670048" cy="274320"/>
+            <a:ext cx="3291840" cy="274320"/>
           </a:xfrm>
           <a:prstGeom prst="rect">
             <a:avLst/>
@@ -11106,7 +11034,7 @@
                   <a:srgbClr val="FFFFFF"/>
                 </a:solidFill>
               </a:rPr>
-              <a:t>zcl_03_main.clas.locals_imp.abap</a:t>
+              <a:t>zcl_pc_estoque_demo.clas.locals_imp.abap</a:t>
             </a:r>
             <a:endParaRPr lang="en-US" sz="950" dirty="0"/>
           </a:p>
@@ -11142,7 +11070,7 @@
                   <a:srgbClr val="9DA5B4"/>
                 </a:solidFill>
               </a:rPr>
-              <a:t>ZCL_03_MAIN › Local Types</a:t>
+              <a:t>ZCL_PC_ESTOQUE_DEMO › Local Types</a:t>
             </a:r>
             <a:endParaRPr lang="en-US" sz="850" dirty="0"/>
           </a:p>
@@ -11708,7 +11636,7 @@
                 <a:ea typeface="Courier New" pitchFamily="34" charset="-122"/>
                 <a:cs typeface="Courier New" pitchFamily="34" charset="-120"/>
               </a:rPr>
-              <a:t>lcl_connection</a:t>
+              <a:t>lcl_item</a:t>
             </a:r>
             <a:r>
               <a:rPr lang="en-US" sz="950" dirty="0">
@@ -11858,18 +11786,18 @@
                 <a:ea typeface="Courier New" pitchFamily="34" charset="-122"/>
                 <a:cs typeface="Courier New" pitchFamily="34" charset="-120"/>
               </a:rPr>
-              <a:t>carrier_id</a:t>
-            </a:r>
-            <a:r>
-              <a:rPr lang="en-US" sz="950" dirty="0">
-                <a:solidFill>
-                  <a:srgbClr val="CCCCCC"/>
-                </a:solidFill>
-                <a:latin typeface="Courier New" pitchFamily="34" charset="0"/>
-                <a:ea typeface="Courier New" pitchFamily="34" charset="-122"/>
-                <a:cs typeface="Courier New" pitchFamily="34" charset="-120"/>
-              </a:rPr>
-              <a:t>    </a:t>
+              <a:t>sku</a:t>
+            </a:r>
+            <a:r>
+              <a:rPr lang="en-US" sz="950" dirty="0">
+                <a:solidFill>
+                  <a:srgbClr val="CCCCCC"/>
+                </a:solidFill>
+                <a:latin typeface="Courier New" pitchFamily="34" charset="0"/>
+                <a:ea typeface="Courier New" pitchFamily="34" charset="-122"/>
+                <a:cs typeface="Courier New" pitchFamily="34" charset="-120"/>
+              </a:rPr>
+              <a:t>          </a:t>
             </a:r>
             <a:r>
               <a:rPr lang="en-US" sz="950" dirty="0">
@@ -11896,13 +11824,13 @@
             <a:r>
               <a:rPr lang="en-US" sz="950" dirty="0">
                 <a:solidFill>
-                  <a:srgbClr val="4EC9B0"/>
-                </a:solidFill>
-                <a:latin typeface="Courier New" pitchFamily="34" charset="0"/>
-                <a:ea typeface="Courier New" pitchFamily="34" charset="-122"/>
-                <a:cs typeface="Courier New" pitchFamily="34" charset="-120"/>
-              </a:rPr>
-              <a:t>/dmo/carrier_id</a:t>
+                  <a:srgbClr val="CCCCCC"/>
+                </a:solidFill>
+                <a:latin typeface="Courier New" pitchFamily="34" charset="0"/>
+                <a:ea typeface="Courier New" pitchFamily="34" charset="-122"/>
+                <a:cs typeface="Courier New" pitchFamily="34" charset="-120"/>
+              </a:rPr>
+              <a:t>zta_pc_item-sku</a:t>
             </a:r>
             <a:r>
               <a:rPr lang="en-US" sz="950" dirty="0">
@@ -11988,7 +11916,7 @@
                 <a:ea typeface="Courier New" pitchFamily="34" charset="-122"/>
                 <a:cs typeface="Courier New" pitchFamily="34" charset="-120"/>
               </a:rPr>
-              <a:t>connection_id</a:t>
+              <a:t>qtde_estoque</a:t>
             </a:r>
             <a:r>
               <a:rPr lang="en-US" sz="950" dirty="0">
@@ -12026,13 +11954,13 @@
             <a:r>
               <a:rPr lang="en-US" sz="950" dirty="0">
                 <a:solidFill>
-                  <a:srgbClr val="4EC9B0"/>
-                </a:solidFill>
-                <a:latin typeface="Courier New" pitchFamily="34" charset="0"/>
-                <a:ea typeface="Courier New" pitchFamily="34" charset="-122"/>
-                <a:cs typeface="Courier New" pitchFamily="34" charset="-120"/>
-              </a:rPr>
-              <a:t>/dmo/connection_id</a:t>
+                  <a:srgbClr val="CCCCCC"/>
+                </a:solidFill>
+                <a:latin typeface="Courier New" pitchFamily="34" charset="0"/>
+                <a:ea typeface="Courier New" pitchFamily="34" charset="-122"/>
+                <a:cs typeface="Courier New" pitchFamily="34" charset="-120"/>
+              </a:rPr>
+              <a:t>i</a:t>
             </a:r>
             <a:r>
               <a:rPr lang="en-US" sz="950" dirty="0">
@@ -12118,7 +12046,7 @@
                 <a:ea typeface="Courier New" pitchFamily="34" charset="-122"/>
                 <a:cs typeface="Courier New" pitchFamily="34" charset="-120"/>
               </a:rPr>
-              <a:t>conn_counter</a:t>
+              <a:t>item_counter</a:t>
             </a:r>
             <a:r>
               <a:rPr lang="en-US" sz="950" dirty="0">
@@ -12301,18 +12229,18 @@
                 <a:ea typeface="Courier New" pitchFamily="34" charset="-122"/>
                 <a:cs typeface="Courier New" pitchFamily="34" charset="-120"/>
               </a:rPr>
-              <a:t>i_carrier_id</a:t>
-            </a:r>
-            <a:r>
-              <a:rPr lang="en-US" sz="950" dirty="0">
-                <a:solidFill>
-                  <a:srgbClr val="CCCCCC"/>
-                </a:solidFill>
-                <a:latin typeface="Courier New" pitchFamily="34" charset="0"/>
-                <a:ea typeface="Courier New" pitchFamily="34" charset="-122"/>
-                <a:cs typeface="Courier New" pitchFamily="34" charset="-120"/>
-              </a:rPr>
-              <a:t>    </a:t>
+              <a:t>i_sku</a:t>
+            </a:r>
+            <a:r>
+              <a:rPr lang="en-US" sz="950" dirty="0">
+                <a:solidFill>
+                  <a:srgbClr val="CCCCCC"/>
+                </a:solidFill>
+                <a:latin typeface="Courier New" pitchFamily="34" charset="0"/>
+                <a:ea typeface="Courier New" pitchFamily="34" charset="-122"/>
+                <a:cs typeface="Courier New" pitchFamily="34" charset="-120"/>
+              </a:rPr>
+              <a:t>          </a:t>
             </a:r>
             <a:r>
               <a:rPr lang="en-US" sz="950" dirty="0">
@@ -12339,13 +12267,13 @@
             <a:r>
               <a:rPr lang="en-US" sz="950" dirty="0">
                 <a:solidFill>
-                  <a:srgbClr val="4EC9B0"/>
-                </a:solidFill>
-                <a:latin typeface="Courier New" pitchFamily="34" charset="0"/>
-                <a:ea typeface="Courier New" pitchFamily="34" charset="-122"/>
-                <a:cs typeface="Courier New" pitchFamily="34" charset="-120"/>
-              </a:rPr>
-              <a:t>/dmo/carrier_id</a:t>
+                  <a:srgbClr val="CCCCCC"/>
+                </a:solidFill>
+                <a:latin typeface="Courier New" pitchFamily="34" charset="0"/>
+                <a:ea typeface="Courier New" pitchFamily="34" charset="-122"/>
+                <a:cs typeface="Courier New" pitchFamily="34" charset="-120"/>
+              </a:rPr>
+              <a:t>zta_pc_item-sku</a:t>
             </a:r>
             <a:endParaRPr lang="en-US" sz="950" dirty="0"/>
           </a:p>
@@ -12376,7 +12304,7 @@
                 <a:ea typeface="Courier New" pitchFamily="34" charset="-122"/>
                 <a:cs typeface="Courier New" pitchFamily="34" charset="-120"/>
               </a:rPr>
-              <a:t>i_connection_id</a:t>
+              <a:t>i_qtde_estoque</a:t>
             </a:r>
             <a:r>
               <a:rPr lang="en-US" sz="950" dirty="0">
@@ -12414,13 +12342,13 @@
             <a:r>
               <a:rPr lang="en-US" sz="950" dirty="0">
                 <a:solidFill>
-                  <a:srgbClr val="4EC9B0"/>
-                </a:solidFill>
-                <a:latin typeface="Courier New" pitchFamily="34" charset="0"/>
-                <a:ea typeface="Courier New" pitchFamily="34" charset="-122"/>
-                <a:cs typeface="Courier New" pitchFamily="34" charset="-120"/>
-              </a:rPr>
-              <a:t>/dmo/connection_id</a:t>
+                  <a:srgbClr val="CCCCCC"/>
+                </a:solidFill>
+                <a:latin typeface="Courier New" pitchFamily="34" charset="0"/>
+                <a:ea typeface="Courier New" pitchFamily="34" charset="-122"/>
+                <a:cs typeface="Courier New" pitchFamily="34" charset="-120"/>
+              </a:rPr>
+              <a:t>i</a:t>
             </a:r>
             <a:endParaRPr lang="en-US" sz="950" dirty="0"/>
           </a:p>
@@ -12577,7 +12505,7 @@
                 <a:ea typeface="Courier New" pitchFamily="34" charset="-122"/>
                 <a:cs typeface="Courier New" pitchFamily="34" charset="-120"/>
               </a:rPr>
-              <a:t>lcl_connection</a:t>
+              <a:t>lcl_item</a:t>
             </a:r>
             <a:r>
               <a:rPr lang="en-US" sz="950" dirty="0">
@@ -12727,7 +12655,7 @@
                 <a:ea typeface="Courier New" pitchFamily="34" charset="-122"/>
                 <a:cs typeface="Courier New" pitchFamily="34" charset="-120"/>
               </a:rPr>
-              <a:t>i_carrier_id</a:t>
+              <a:t>i_sku</a:t>
             </a:r>
             <a:r>
               <a:rPr lang="en-US" sz="950" dirty="0">
@@ -12815,7 +12743,7 @@
                 <a:ea typeface="Courier New" pitchFamily="34" charset="-122"/>
                 <a:cs typeface="Courier New" pitchFamily="34" charset="-120"/>
               </a:rPr>
-              <a:t>i_connection_id</a:t>
+              <a:t>i_qtde_estoque</a:t>
             </a:r>
             <a:r>
               <a:rPr lang="en-US" sz="950" dirty="0">
@@ -12831,13 +12759,13 @@
             <a:r>
               <a:rPr lang="en-US" sz="950" dirty="0">
                 <a:solidFill>
-                  <a:srgbClr val="569CD6"/>
-                </a:solidFill>
-                <a:latin typeface="Courier New" pitchFamily="34" charset="0"/>
-                <a:ea typeface="Courier New" pitchFamily="34" charset="-122"/>
-                <a:cs typeface="Courier New" pitchFamily="34" charset="-120"/>
-              </a:rPr>
-              <a:t>IS</a:t>
+                  <a:srgbClr val="CCCCCC"/>
+                </a:solidFill>
+                <a:latin typeface="Courier New" pitchFamily="34" charset="0"/>
+                <a:ea typeface="Courier New" pitchFamily="34" charset="-122"/>
+                <a:cs typeface="Courier New" pitchFamily="34" charset="-120"/>
+              </a:rPr>
+              <a:t>&lt;</a:t>
             </a:r>
             <a:r>
               <a:rPr lang="en-US" sz="950" dirty="0">
@@ -12853,13 +12781,13 @@
             <a:r>
               <a:rPr lang="en-US" sz="950" dirty="0">
                 <a:solidFill>
-                  <a:srgbClr val="569CD6"/>
-                </a:solidFill>
-                <a:latin typeface="Courier New" pitchFamily="34" charset="0"/>
-                <a:ea typeface="Courier New" pitchFamily="34" charset="-122"/>
-                <a:cs typeface="Courier New" pitchFamily="34" charset="-120"/>
-              </a:rPr>
-              <a:t>INITIAL</a:t>
+                  <a:srgbClr val="B5CEA8"/>
+                </a:solidFill>
+                <a:latin typeface="Courier New" pitchFamily="34" charset="0"/>
+                <a:ea typeface="Courier New" pitchFamily="34" charset="-122"/>
+                <a:cs typeface="Courier New" pitchFamily="34" charset="-120"/>
+              </a:rPr>
+              <a:t>0</a:t>
             </a:r>
             <a:r>
               <a:rPr lang="en-US" sz="950" dirty="0">
@@ -13051,18 +12979,18 @@
                 <a:ea typeface="Courier New" pitchFamily="34" charset="-122"/>
                 <a:cs typeface="Courier New" pitchFamily="34" charset="-120"/>
               </a:rPr>
-              <a:t>carrier_id</a:t>
-            </a:r>
-            <a:r>
-              <a:rPr lang="en-US" sz="950" dirty="0">
-                <a:solidFill>
-                  <a:srgbClr val="CCCCCC"/>
-                </a:solidFill>
-                <a:latin typeface="Courier New" pitchFamily="34" charset="0"/>
-                <a:ea typeface="Courier New" pitchFamily="34" charset="-122"/>
-                <a:cs typeface="Courier New" pitchFamily="34" charset="-120"/>
-              </a:rPr>
-              <a:t>    </a:t>
+              <a:t>sku</a:t>
+            </a:r>
+            <a:r>
+              <a:rPr lang="en-US" sz="950" dirty="0">
+                <a:solidFill>
+                  <a:srgbClr val="CCCCCC"/>
+                </a:solidFill>
+                <a:latin typeface="Courier New" pitchFamily="34" charset="0"/>
+                <a:ea typeface="Courier New" pitchFamily="34" charset="-122"/>
+                <a:cs typeface="Courier New" pitchFamily="34" charset="-120"/>
+              </a:rPr>
+              <a:t>          </a:t>
             </a:r>
             <a:r>
               <a:rPr lang="en-US" sz="950" dirty="0">
@@ -13095,7 +13023,7 @@
                 <a:ea typeface="Courier New" pitchFamily="34" charset="-122"/>
                 <a:cs typeface="Courier New" pitchFamily="34" charset="-120"/>
               </a:rPr>
-              <a:t>i_carrier_id</a:t>
+              <a:t>i_sku</a:t>
             </a:r>
             <a:r>
               <a:rPr lang="en-US" sz="950" dirty="0">
@@ -13137,7 +13065,7 @@
                 <a:ea typeface="Courier New" pitchFamily="34" charset="-122"/>
                 <a:cs typeface="Courier New" pitchFamily="34" charset="-120"/>
               </a:rPr>
-              <a:t>connection_id</a:t>
+              <a:t>qtde_estoque</a:t>
             </a:r>
             <a:r>
               <a:rPr lang="en-US" sz="950" dirty="0">
@@ -13181,7 +13109,7 @@
                 <a:ea typeface="Courier New" pitchFamily="34" charset="-122"/>
                 <a:cs typeface="Courier New" pitchFamily="34" charset="-120"/>
               </a:rPr>
-              <a:t>i_connection_id</a:t>
+              <a:t>i_qtde_estoque</a:t>
             </a:r>
             <a:r>
               <a:rPr lang="en-US" sz="950" dirty="0">
@@ -13223,7 +13151,7 @@
                 <a:ea typeface="Courier New" pitchFamily="34" charset="-122"/>
                 <a:cs typeface="Courier New" pitchFamily="34" charset="-120"/>
               </a:rPr>
-              <a:t>conn_counter</a:t>
+              <a:t>item_counter</a:t>
             </a:r>
             <a:r>
               <a:rPr lang="en-US" sz="950" dirty="0">
@@ -13402,7 +13330,7 @@
                 <a:ea typeface="Courier New" pitchFamily="34" charset="-122"/>
                 <a:cs typeface="Courier New" pitchFamily="34" charset="-120"/>
               </a:rPr>
-              <a:t>" Uso: DATA(conn) = NEW lcl_connection( i_carrier_id = 'LH'</a:t>
+              <a:t>" Uso: DATA(item) = NEW lcl_item( i_sku          = 'SKU-ELE-0000000001'</a:t>
             </a:r>
             <a:endParaRPr lang="en-US" sz="950" dirty="0"/>
           </a:p>
@@ -13422,7 +13350,7 @@
                 <a:ea typeface="Courier New" pitchFamily="34" charset="-122"/>
                 <a:cs typeface="Courier New" pitchFamily="34" charset="-120"/>
               </a:rPr>
-              <a:t>"                                     i_connection_id = '0400' ).</a:t>
+              <a:t>"                                i_qtde_estoque = 25 ).</a:t>
             </a:r>
             <a:endParaRPr lang="en-US" sz="950" dirty="0"/>
           </a:p>
@@ -14474,7 +14402,7 @@
         </p:blipFill>
         <p:spPr>
           <a:xfrm>
-            <a:off x="850392" y="2768727"/>
+            <a:off x="6511900" y="2768727"/>
             <a:ext cx="256032" cy="256032"/>
           </a:xfrm>
           <a:prstGeom prst="rect">
@@ -14498,8 +14426,8 @@
         </p:blipFill>
         <p:spPr>
           <a:xfrm>
-            <a:off x="6511900" y="2768727"/>
-            <a:ext cx="256032" cy="256032"/>
+            <a:off x="749808" y="4912233"/>
+            <a:ext cx="310896" cy="310896"/>
           </a:xfrm>
           <a:prstGeom prst="rect">
             <a:avLst/>
@@ -14522,8 +14450,8 @@
         </p:blipFill>
         <p:spPr>
           <a:xfrm>
-            <a:off x="749808" y="4912233"/>
-            <a:ext cx="310896" cy="310896"/>
+            <a:off x="850392" y="2768727"/>
+            <a:ext cx="256032" cy="256032"/>
           </a:xfrm>
           <a:prstGeom prst="rect">
             <a:avLst/>
@@ -16976,7 +16904,7 @@
                   <a:srgbClr val="1D2D3E"/>
                 </a:solidFill>
               </a:rPr>
-              <a:t>modelamos uma conexão de voo (</a:t>
+              <a:t>modelamos o item de estoque do projeto Pedidos de Compras (</a:t>
             </a:r>
             <a:r>
               <a:rPr lang="en-US" sz="1200" dirty="0">
@@ -16987,7 +16915,7 @@
                 <a:ea typeface="Courier New" pitchFamily="34" charset="-122"/>
                 <a:cs typeface="Courier New" pitchFamily="34" charset="-120"/>
               </a:rPr>
-              <a:t>lcl_connection</a:t>
+              <a:t>lcl_item</a:t>
             </a:r>
             <a:r>
               <a:rPr lang="en-US" sz="1200" dirty="0">
@@ -16995,7 +16923,7 @@
                   <a:srgbClr val="1D2D3E"/>
                 </a:solidFill>
               </a:rPr>
-              <a:t>) e a evoluímos de atributos públicos até um objeto que garante a própria consistência.</a:t>
+              <a:t>) e o evoluímos de atributos públicos até um objeto que garante a própria consistência.</a:t>
             </a:r>
             <a:endParaRPr lang="en-US" sz="1400" dirty="0"/>
           </a:p>
@@ -17017,7 +16945,7 @@
         </p:blipFill>
         <p:spPr>
           <a:xfrm>
-            <a:off x="5455768" y="1847088"/>
+            <a:off x="2636444" y="1847088"/>
             <a:ext cx="347472" cy="347472"/>
           </a:xfrm>
           <a:prstGeom prst="rect">
@@ -17041,7 +16969,7 @@
         </p:blipFill>
         <p:spPr>
           <a:xfrm>
-            <a:off x="2636444" y="1847088"/>
+            <a:off x="5455768" y="1847088"/>
             <a:ext cx="347472" cy="347472"/>
           </a:xfrm>
           <a:prstGeom prst="rect">
@@ -17065,7 +16993,7 @@
         </p:blipFill>
         <p:spPr>
           <a:xfrm>
-            <a:off x="8275091" y="1847088"/>
+            <a:off x="2636444" y="3858768"/>
             <a:ext cx="347472" cy="347472"/>
           </a:xfrm>
           <a:prstGeom prst="rect">
@@ -17113,7 +17041,7 @@
         </p:blipFill>
         <p:spPr>
           <a:xfrm>
-            <a:off x="2636444" y="3858768"/>
+            <a:off x="8275091" y="1847088"/>
             <a:ext cx="347472" cy="347472"/>
           </a:xfrm>
           <a:prstGeom prst="rect">
@@ -17820,7 +17748,7 @@
         </p:blipFill>
         <p:spPr>
           <a:xfrm>
-            <a:off x="850392" y="2661412"/>
+            <a:off x="8399069" y="2661412"/>
             <a:ext cx="256032" cy="256032"/>
           </a:xfrm>
           <a:prstGeom prst="rect">
@@ -17844,8 +17772,8 @@
         </p:blipFill>
         <p:spPr>
           <a:xfrm>
-            <a:off x="4624730" y="2661412"/>
-            <a:ext cx="256032" cy="256032"/>
+            <a:off x="749808" y="5019548"/>
+            <a:ext cx="310896" cy="310896"/>
           </a:xfrm>
           <a:prstGeom prst="rect">
             <a:avLst/>
@@ -17868,7 +17796,7 @@
         </p:blipFill>
         <p:spPr>
           <a:xfrm>
-            <a:off x="8399069" y="2661412"/>
+            <a:off x="850392" y="2661412"/>
             <a:ext cx="256032" cy="256032"/>
           </a:xfrm>
           <a:prstGeom prst="rect">
@@ -17892,8 +17820,8 @@
         </p:blipFill>
         <p:spPr>
           <a:xfrm>
-            <a:off x="749808" y="5019548"/>
-            <a:ext cx="310896" cy="310896"/>
+            <a:off x="4624730" y="2661412"/>
+            <a:ext cx="256032" cy="256032"/>
           </a:xfrm>
           <a:prstGeom prst="rect">
             <a:avLst/>
@@ -18561,7 +18489,7 @@
         <p:spPr>
           <a:xfrm>
             <a:off x="640080" y="1700784"/>
-            <a:ext cx="2852928" cy="292608"/>
+            <a:ext cx="3474720" cy="292608"/>
           </a:xfrm>
           <a:prstGeom prst="rect">
             <a:avLst/>
@@ -18581,7 +18509,7 @@
         <p:spPr>
           <a:xfrm>
             <a:off x="640080" y="1700784"/>
-            <a:ext cx="2852928" cy="27432"/>
+            <a:ext cx="3474720" cy="27432"/>
           </a:xfrm>
           <a:prstGeom prst="rect">
             <a:avLst/>
@@ -18601,7 +18529,7 @@
         <p:spPr>
           <a:xfrm>
             <a:off x="731520" y="1719072"/>
-            <a:ext cx="2670048" cy="274320"/>
+            <a:ext cx="3291840" cy="274320"/>
           </a:xfrm>
           <a:prstGeom prst="rect">
             <a:avLst/>
@@ -18622,7 +18550,7 @@
                   <a:srgbClr val="FFFFFF"/>
                 </a:solidFill>
               </a:rPr>
-              <a:t>zcl_03_main.clas.locals_imp.abap</a:t>
+              <a:t>zcl_pc_estoque_demo.clas.locals_imp.abap</a:t>
             </a:r>
             <a:endParaRPr lang="en-US" sz="950" dirty="0"/>
           </a:p>
@@ -18658,7 +18586,7 @@
                   <a:srgbClr val="9DA5B4"/>
                 </a:solidFill>
               </a:rPr>
-              <a:t>ZCL_03_MAIN › Local Types</a:t>
+              <a:t>ZCL_PC_ESTOQUE_DEMO › Local Types (regras do BO Item)</a:t>
             </a:r>
             <a:endParaRPr lang="en-US" sz="850" dirty="0"/>
           </a:p>
@@ -19064,7 +18992,7 @@
                 <a:ea typeface="Courier New" pitchFamily="34" charset="-122"/>
                 <a:cs typeface="Courier New" pitchFamily="34" charset="-120"/>
               </a:rPr>
-              <a:t>lcl_connection</a:t>
+              <a:t>lcl_item</a:t>
             </a:r>
             <a:r>
               <a:rPr lang="en-US" sz="1050" dirty="0">
@@ -19214,7 +19142,7 @@
                 <a:ea typeface="Courier New" pitchFamily="34" charset="-122"/>
                 <a:cs typeface="Courier New" pitchFamily="34" charset="-120"/>
               </a:rPr>
-              <a:t>t_seats</a:t>
+              <a:t>t_qtde</a:t>
             </a:r>
             <a:r>
               <a:rPr lang="en-US" sz="1050" dirty="0">
@@ -19322,7 +19250,7 @@
                 <a:ea typeface="Courier New" pitchFamily="34" charset="-122"/>
                 <a:cs typeface="Courier New" pitchFamily="34" charset="-120"/>
               </a:rPr>
-              <a:t>c_max_seats</a:t>
+              <a:t>c_limite_acabando</a:t>
             </a:r>
             <a:r>
               <a:rPr lang="en-US" sz="1050" dirty="0">
@@ -19366,7 +19294,7 @@
                 <a:ea typeface="Courier New" pitchFamily="34" charset="-122"/>
                 <a:cs typeface="Courier New" pitchFamily="34" charset="-120"/>
               </a:rPr>
-              <a:t>t_seats</a:t>
+              <a:t>t_qtde</a:t>
             </a:r>
             <a:r>
               <a:rPr lang="en-US" sz="1050" dirty="0">
@@ -19410,7 +19338,7 @@
                 <a:ea typeface="Courier New" pitchFamily="34" charset="-122"/>
                 <a:cs typeface="Courier New" pitchFamily="34" charset="-120"/>
               </a:rPr>
-              <a:t>200</a:t>
+              <a:t>10</a:t>
             </a:r>
             <a:r>
               <a:rPr lang="en-US" sz="1050" dirty="0">
@@ -19494,18 +19422,18 @@
                 <a:ea typeface="Courier New" pitchFamily="34" charset="-122"/>
                 <a:cs typeface="Courier New" pitchFamily="34" charset="-120"/>
               </a:rPr>
-              <a:t>carrier_id</a:t>
-            </a:r>
-            <a:r>
-              <a:rPr lang="en-US" sz="1050" dirty="0">
-                <a:solidFill>
-                  <a:srgbClr val="CCCCCC"/>
-                </a:solidFill>
-                <a:latin typeface="Courier New" pitchFamily="34" charset="0"/>
-                <a:ea typeface="Courier New" pitchFamily="34" charset="-122"/>
-                <a:cs typeface="Courier New" pitchFamily="34" charset="-120"/>
-              </a:rPr>
-              <a:t>    </a:t>
+              <a:t>sku</a:t>
+            </a:r>
+            <a:r>
+              <a:rPr lang="en-US" sz="1050" dirty="0">
+                <a:solidFill>
+                  <a:srgbClr val="CCCCCC"/>
+                </a:solidFill>
+                <a:latin typeface="Courier New" pitchFamily="34" charset="0"/>
+                <a:ea typeface="Courier New" pitchFamily="34" charset="-122"/>
+                <a:cs typeface="Courier New" pitchFamily="34" charset="-120"/>
+              </a:rPr>
+              <a:t>          </a:t>
             </a:r>
             <a:r>
               <a:rPr lang="en-US" sz="1050" dirty="0">
@@ -19532,13 +19460,13 @@
             <a:r>
               <a:rPr lang="en-US" sz="1050" dirty="0">
                 <a:solidFill>
-                  <a:srgbClr val="4EC9B0"/>
-                </a:solidFill>
-                <a:latin typeface="Courier New" pitchFamily="34" charset="0"/>
-                <a:ea typeface="Courier New" pitchFamily="34" charset="-122"/>
-                <a:cs typeface="Courier New" pitchFamily="34" charset="-120"/>
-              </a:rPr>
-              <a:t>/dmo/carrier_id</a:t>
+                  <a:srgbClr val="CCCCCC"/>
+                </a:solidFill>
+                <a:latin typeface="Courier New" pitchFamily="34" charset="0"/>
+                <a:ea typeface="Courier New" pitchFamily="34" charset="-122"/>
+                <a:cs typeface="Courier New" pitchFamily="34" charset="-120"/>
+              </a:rPr>
+              <a:t>zta_pc_item-sku</a:t>
             </a:r>
             <a:r>
               <a:rPr lang="en-US" sz="1050" dirty="0">
@@ -19602,7 +19530,7 @@
                 <a:ea typeface="Courier New" pitchFamily="34" charset="-122"/>
                 <a:cs typeface="Courier New" pitchFamily="34" charset="-120"/>
               </a:rPr>
-              <a:t>connection_id</a:t>
+              <a:t>qtde_estoque</a:t>
             </a:r>
             <a:r>
               <a:rPr lang="en-US" sz="1050" dirty="0">
@@ -19640,13 +19568,13 @@
             <a:r>
               <a:rPr lang="en-US" sz="1050" dirty="0">
                 <a:solidFill>
-                  <a:srgbClr val="4EC9B0"/>
-                </a:solidFill>
-                <a:latin typeface="Courier New" pitchFamily="34" charset="0"/>
-                <a:ea typeface="Courier New" pitchFamily="34" charset="-122"/>
-                <a:cs typeface="Courier New" pitchFamily="34" charset="-120"/>
-              </a:rPr>
-              <a:t>/dmo/connection_id</a:t>
+                  <a:srgbClr val="CCCCCC"/>
+                </a:solidFill>
+                <a:latin typeface="Courier New" pitchFamily="34" charset="0"/>
+                <a:ea typeface="Courier New" pitchFamily="34" charset="-122"/>
+                <a:cs typeface="Courier New" pitchFamily="34" charset="-120"/>
+              </a:rPr>
+              <a:t>t_qtde</a:t>
             </a:r>
             <a:r>
               <a:rPr lang="en-US" sz="1050" dirty="0">
@@ -19730,7 +19658,7 @@
                 <a:ea typeface="Courier New" pitchFamily="34" charset="-122"/>
                 <a:cs typeface="Courier New" pitchFamily="34" charset="-120"/>
               </a:rPr>
-              <a:t>conn_counter</a:t>
+              <a:t>item_counter</a:t>
             </a:r>
             <a:r>
               <a:rPr lang="en-US" sz="1050" dirty="0">
@@ -19922,7 +19850,7 @@
                 <a:ea typeface="Courier New" pitchFamily="34" charset="-122"/>
                 <a:cs typeface="Courier New" pitchFamily="34" charset="-120"/>
               </a:rPr>
-              <a:t>airport_from_id</a:t>
+              <a:t>qtde_reservada</a:t>
             </a:r>
             <a:r>
               <a:rPr lang="en-US" sz="1050" dirty="0">
@@ -19960,13 +19888,13 @@
             <a:r>
               <a:rPr lang="en-US" sz="1050" dirty="0">
                 <a:solidFill>
-                  <a:srgbClr val="4EC9B0"/>
-                </a:solidFill>
-                <a:latin typeface="Courier New" pitchFamily="34" charset="0"/>
-                <a:ea typeface="Courier New" pitchFamily="34" charset="-122"/>
-                <a:cs typeface="Courier New" pitchFamily="34" charset="-120"/>
-              </a:rPr>
-              <a:t>/dmo/airport_from_id</a:t>
+                  <a:srgbClr val="CCCCCC"/>
+                </a:solidFill>
+                <a:latin typeface="Courier New" pitchFamily="34" charset="0"/>
+                <a:ea typeface="Courier New" pitchFamily="34" charset="-122"/>
+                <a:cs typeface="Courier New" pitchFamily="34" charset="-120"/>
+              </a:rPr>
+              <a:t>t_qtde</a:t>
             </a:r>
             <a:r>
               <a:rPr lang="en-US" sz="1050" dirty="0">
@@ -20070,7 +19998,7 @@
                 <a:ea typeface="Courier New" pitchFamily="34" charset="-122"/>
                 <a:cs typeface="Courier New" pitchFamily="34" charset="-120"/>
               </a:rPr>
-              <a:t>lcl_connection</a:t>
+              <a:t>lcl_item</a:t>
             </a:r>
             <a:r>
               <a:rPr lang="en-US" sz="1050" dirty="0">
@@ -22487,7 +22415,7 @@
         <p:spPr>
           <a:xfrm>
             <a:off x="640080" y="1700784"/>
-            <a:ext cx="1997964" cy="292608"/>
+            <a:ext cx="2619756" cy="292608"/>
           </a:xfrm>
           <a:prstGeom prst="rect">
             <a:avLst/>
@@ -22507,7 +22435,7 @@
         <p:spPr>
           <a:xfrm>
             <a:off x="640080" y="1700784"/>
-            <a:ext cx="1997964" cy="27432"/>
+            <a:ext cx="2619756" cy="27432"/>
           </a:xfrm>
           <a:prstGeom prst="rect">
             <a:avLst/>
@@ -22527,7 +22455,7 @@
         <p:spPr>
           <a:xfrm>
             <a:off x="731520" y="1719072"/>
-            <a:ext cx="1815084" cy="274320"/>
+            <a:ext cx="2436876" cy="274320"/>
           </a:xfrm>
           <a:prstGeom prst="rect">
             <a:avLst/>
@@ -22548,7 +22476,7 @@
                   <a:srgbClr val="FFFFFF"/>
                 </a:solidFill>
               </a:rPr>
-              <a:t>zcl_03_main.clas.abap</a:t>
+              <a:t>zcl_pc_estoque_demo.clas.abap</a:t>
             </a:r>
             <a:endParaRPr lang="en-US" sz="950" dirty="0"/>
           </a:p>
@@ -22584,7 +22512,7 @@
                   <a:srgbClr val="9DA5B4"/>
                 </a:solidFill>
               </a:rPr>
-              <a:t>ZCL_03_MAIN › if_oo_adt_classrun~main</a:t>
+              <a:t>ZCL_PC_ESTOQUE_DEMO › if_oo_adt_classrun~main</a:t>
             </a:r>
             <a:endParaRPr lang="en-US" sz="850" dirty="0"/>
           </a:p>
@@ -22950,7 +22878,7 @@
                 <a:ea typeface="Courier New" pitchFamily="34" charset="-122"/>
                 <a:cs typeface="Courier New" pitchFamily="34" charset="-120"/>
               </a:rPr>
-              <a:t>connection</a:t>
+              <a:t>item</a:t>
             </a:r>
             <a:r>
               <a:rPr lang="en-US" sz="1050" dirty="0">
@@ -23038,7 +22966,7 @@
                 <a:ea typeface="Courier New" pitchFamily="34" charset="-122"/>
                 <a:cs typeface="Courier New" pitchFamily="34" charset="-120"/>
               </a:rPr>
-              <a:t>lcl_connection</a:t>
+              <a:t>lcl_item</a:t>
             </a:r>
             <a:r>
               <a:rPr lang="en-US" sz="1050" dirty="0">
@@ -23091,7 +23019,7 @@
                 <a:ea typeface="Courier New" pitchFamily="34" charset="-122"/>
                 <a:cs typeface="Courier New" pitchFamily="34" charset="-120"/>
               </a:rPr>
-              <a:t>connections</a:t>
+              <a:t>itens</a:t>
             </a:r>
             <a:r>
               <a:rPr lang="en-US" sz="1050" dirty="0">
@@ -23223,7 +23151,7 @@
                 <a:ea typeface="Courier New" pitchFamily="34" charset="-122"/>
                 <a:cs typeface="Courier New" pitchFamily="34" charset="-120"/>
               </a:rPr>
-              <a:t>lcl_connection</a:t>
+              <a:t>lcl_item</a:t>
             </a:r>
             <a:r>
               <a:rPr lang="en-US" sz="1050" dirty="0">
@@ -23274,7 +23202,7 @@
                 <a:ea typeface="Courier New" pitchFamily="34" charset="-122"/>
                 <a:cs typeface="Courier New" pitchFamily="34" charset="-120"/>
               </a:rPr>
-              <a:t>connection</a:t>
+              <a:t>item</a:t>
             </a:r>
             <a:r>
               <a:rPr lang="en-US" sz="1050" dirty="0">
@@ -23404,7 +23332,7 @@
                 <a:ea typeface="Courier New" pitchFamily="34" charset="-122"/>
                 <a:cs typeface="Courier New" pitchFamily="34" charset="-120"/>
               </a:rPr>
-              <a:t>connection-</a:t>
+              <a:t>item-</a:t>
             </a:r>
             <a:r>
               <a:rPr lang="en-US" sz="1050" dirty="0">
@@ -23426,18 +23354,18 @@
                 <a:ea typeface="Courier New" pitchFamily="34" charset="-122"/>
                 <a:cs typeface="Courier New" pitchFamily="34" charset="-120"/>
               </a:rPr>
-              <a:t>carrier_id</a:t>
-            </a:r>
-            <a:r>
-              <a:rPr lang="en-US" sz="1050" dirty="0">
-                <a:solidFill>
-                  <a:srgbClr val="CCCCCC"/>
-                </a:solidFill>
-                <a:latin typeface="Courier New" pitchFamily="34" charset="0"/>
-                <a:ea typeface="Courier New" pitchFamily="34" charset="-122"/>
-                <a:cs typeface="Courier New" pitchFamily="34" charset="-120"/>
-              </a:rPr>
-              <a:t>    </a:t>
+              <a:t>sku</a:t>
+            </a:r>
+            <a:r>
+              <a:rPr lang="en-US" sz="1050" dirty="0">
+                <a:solidFill>
+                  <a:srgbClr val="CCCCCC"/>
+                </a:solidFill>
+                <a:latin typeface="Courier New" pitchFamily="34" charset="0"/>
+                <a:ea typeface="Courier New" pitchFamily="34" charset="-122"/>
+                <a:cs typeface="Courier New" pitchFamily="34" charset="-120"/>
+              </a:rPr>
+              <a:t>          </a:t>
             </a:r>
             <a:r>
               <a:rPr lang="en-US" sz="1050" dirty="0">
@@ -23470,7 +23398,7 @@
                 <a:ea typeface="Courier New" pitchFamily="34" charset="-122"/>
                 <a:cs typeface="Courier New" pitchFamily="34" charset="-120"/>
               </a:rPr>
-              <a:t>'LH'</a:t>
+              <a:t>'SKU-ELE-0000000001'</a:t>
             </a:r>
             <a:r>
               <a:rPr lang="en-US" sz="1050" dirty="0">
@@ -23501,7 +23429,7 @@
                 <a:ea typeface="Courier New" pitchFamily="34" charset="-122"/>
                 <a:cs typeface="Courier New" pitchFamily="34" charset="-120"/>
               </a:rPr>
-              <a:t>connection-</a:t>
+              <a:t>item-</a:t>
             </a:r>
             <a:r>
               <a:rPr lang="en-US" sz="1050" dirty="0">
@@ -23523,7 +23451,7 @@
                 <a:ea typeface="Courier New" pitchFamily="34" charset="-122"/>
                 <a:cs typeface="Courier New" pitchFamily="34" charset="-120"/>
               </a:rPr>
-              <a:t>connection_id</a:t>
+              <a:t>qtde_estoque</a:t>
             </a:r>
             <a:r>
               <a:rPr lang="en-US" sz="1050" dirty="0">
@@ -23561,13 +23489,13 @@
             <a:r>
               <a:rPr lang="en-US" sz="1050" dirty="0">
                 <a:solidFill>
-                  <a:srgbClr val="CE9178"/>
-                </a:solidFill>
-                <a:latin typeface="Courier New" pitchFamily="34" charset="0"/>
-                <a:ea typeface="Courier New" pitchFamily="34" charset="-122"/>
-                <a:cs typeface="Courier New" pitchFamily="34" charset="-120"/>
-              </a:rPr>
-              <a:t>'0400'</a:t>
+                  <a:srgbClr val="B5CEA8"/>
+                </a:solidFill>
+                <a:latin typeface="Courier New" pitchFamily="34" charset="0"/>
+                <a:ea typeface="Courier New" pitchFamily="34" charset="-122"/>
+                <a:cs typeface="Courier New" pitchFamily="34" charset="-120"/>
+              </a:rPr>
+              <a:t>25</a:t>
             </a:r>
             <a:r>
               <a:rPr lang="en-US" sz="1050" dirty="0">
@@ -23598,18 +23526,18 @@
                 <a:ea typeface="Courier New" pitchFamily="34" charset="-122"/>
                 <a:cs typeface="Courier New" pitchFamily="34" charset="-120"/>
               </a:rPr>
-              <a:t>lcl_connection=&gt;</a:t>
-            </a:r>
-            <a:r>
-              <a:rPr lang="en-US" sz="1050" dirty="0">
-                <a:solidFill>
-                  <a:srgbClr val="CCCCCC"/>
-                </a:solidFill>
-                <a:latin typeface="Courier New" pitchFamily="34" charset="0"/>
-                <a:ea typeface="Courier New" pitchFamily="34" charset="-122"/>
-                <a:cs typeface="Courier New" pitchFamily="34" charset="-120"/>
-              </a:rPr>
-              <a:t>conn_counter</a:t>
+              <a:t>lcl_item=&gt;</a:t>
+            </a:r>
+            <a:r>
+              <a:rPr lang="en-US" sz="1050" dirty="0">
+                <a:solidFill>
+                  <a:srgbClr val="CCCCCC"/>
+                </a:solidFill>
+                <a:latin typeface="Courier New" pitchFamily="34" charset="0"/>
+                <a:ea typeface="Courier New" pitchFamily="34" charset="-122"/>
+                <a:cs typeface="Courier New" pitchFamily="34" charset="-120"/>
+              </a:rPr>
+              <a:t>item_counter</a:t>
             </a:r>
             <a:r>
               <a:rPr lang="en-US" sz="1050" dirty="0">
@@ -23717,7 +23645,7 @@
                 <a:ea typeface="Courier New" pitchFamily="34" charset="-122"/>
                 <a:cs typeface="Courier New" pitchFamily="34" charset="-120"/>
               </a:rPr>
-              <a:t>connection</a:t>
+              <a:t>item</a:t>
             </a:r>
             <a:r>
               <a:rPr lang="en-US" sz="1050" dirty="0">
@@ -23761,7 +23689,7 @@
                 <a:ea typeface="Courier New" pitchFamily="34" charset="-122"/>
                 <a:cs typeface="Courier New" pitchFamily="34" charset="-120"/>
               </a:rPr>
-              <a:t>connections</a:t>
+              <a:t>itens</a:t>
             </a:r>
             <a:r>
               <a:rPr lang="en-US" sz="1050" dirty="0">
@@ -23812,7 +23740,7 @@
                 <a:ea typeface="Courier New" pitchFamily="34" charset="-122"/>
                 <a:cs typeface="Courier New" pitchFamily="34" charset="-120"/>
               </a:rPr>
-              <a:t>connection</a:t>
+              <a:t>item</a:t>
             </a:r>
             <a:r>
               <a:rPr lang="en-US" sz="1050" dirty="0">
@@ -23964,7 +23892,7 @@
                 <a:ea typeface="Courier New" pitchFamily="34" charset="-122"/>
                 <a:cs typeface="Courier New" pitchFamily="34" charset="-120"/>
               </a:rPr>
-              <a:t>connection-</a:t>
+              <a:t>item-</a:t>
             </a:r>
             <a:r>
               <a:rPr lang="en-US" sz="1050" dirty="0">
@@ -23986,18 +23914,18 @@
                 <a:ea typeface="Courier New" pitchFamily="34" charset="-122"/>
                 <a:cs typeface="Courier New" pitchFamily="34" charset="-120"/>
               </a:rPr>
-              <a:t>carrier_id</a:t>
-            </a:r>
-            <a:r>
-              <a:rPr lang="en-US" sz="1050" dirty="0">
-                <a:solidFill>
-                  <a:srgbClr val="CCCCCC"/>
-                </a:solidFill>
-                <a:latin typeface="Courier New" pitchFamily="34" charset="0"/>
-                <a:ea typeface="Courier New" pitchFamily="34" charset="-122"/>
-                <a:cs typeface="Courier New" pitchFamily="34" charset="-120"/>
-              </a:rPr>
-              <a:t>    </a:t>
+              <a:t>sku</a:t>
+            </a:r>
+            <a:r>
+              <a:rPr lang="en-US" sz="1050" dirty="0">
+                <a:solidFill>
+                  <a:srgbClr val="CCCCCC"/>
+                </a:solidFill>
+                <a:latin typeface="Courier New" pitchFamily="34" charset="0"/>
+                <a:ea typeface="Courier New" pitchFamily="34" charset="-122"/>
+                <a:cs typeface="Courier New" pitchFamily="34" charset="-120"/>
+              </a:rPr>
+              <a:t>          </a:t>
             </a:r>
             <a:r>
               <a:rPr lang="en-US" sz="1050" dirty="0">
@@ -24030,7 +23958,7 @@
                 <a:ea typeface="Courier New" pitchFamily="34" charset="-122"/>
                 <a:cs typeface="Courier New" pitchFamily="34" charset="-120"/>
               </a:rPr>
-              <a:t>'AA'</a:t>
+              <a:t>'SKU-INF-0000000002'</a:t>
             </a:r>
             <a:r>
               <a:rPr lang="en-US" sz="1050" dirty="0">
@@ -24061,7 +23989,7 @@
                 <a:ea typeface="Courier New" pitchFamily="34" charset="-122"/>
                 <a:cs typeface="Courier New" pitchFamily="34" charset="-120"/>
               </a:rPr>
-              <a:t>connection-</a:t>
+              <a:t>item-</a:t>
             </a:r>
             <a:r>
               <a:rPr lang="en-US" sz="1050" dirty="0">
@@ -24083,7 +24011,7 @@
                 <a:ea typeface="Courier New" pitchFamily="34" charset="-122"/>
                 <a:cs typeface="Courier New" pitchFamily="34" charset="-120"/>
               </a:rPr>
-              <a:t>connection_id</a:t>
+              <a:t>qtde_estoque</a:t>
             </a:r>
             <a:r>
               <a:rPr lang="en-US" sz="1050" dirty="0">
@@ -24121,13 +24049,13 @@
             <a:r>
               <a:rPr lang="en-US" sz="1050" dirty="0">
                 <a:solidFill>
-                  <a:srgbClr val="CE9178"/>
-                </a:solidFill>
-                <a:latin typeface="Courier New" pitchFamily="34" charset="0"/>
-                <a:ea typeface="Courier New" pitchFamily="34" charset="-122"/>
-                <a:cs typeface="Courier New" pitchFamily="34" charset="-120"/>
-              </a:rPr>
-              <a:t>'0017'</a:t>
+                  <a:srgbClr val="B5CEA8"/>
+                </a:solidFill>
+                <a:latin typeface="Courier New" pitchFamily="34" charset="0"/>
+                <a:ea typeface="Courier New" pitchFamily="34" charset="-122"/>
+                <a:cs typeface="Courier New" pitchFamily="34" charset="-120"/>
+              </a:rPr>
+              <a:t>4</a:t>
             </a:r>
             <a:r>
               <a:rPr lang="en-US" sz="1050" dirty="0">
@@ -24158,18 +24086,18 @@
                 <a:ea typeface="Courier New" pitchFamily="34" charset="-122"/>
                 <a:cs typeface="Courier New" pitchFamily="34" charset="-120"/>
               </a:rPr>
-              <a:t>lcl_connection=&gt;</a:t>
-            </a:r>
-            <a:r>
-              <a:rPr lang="en-US" sz="1050" dirty="0">
-                <a:solidFill>
-                  <a:srgbClr val="CCCCCC"/>
-                </a:solidFill>
-                <a:latin typeface="Courier New" pitchFamily="34" charset="0"/>
-                <a:ea typeface="Courier New" pitchFamily="34" charset="-122"/>
-                <a:cs typeface="Courier New" pitchFamily="34" charset="-120"/>
-              </a:rPr>
-              <a:t>conn_counter</a:t>
+              <a:t>lcl_item=&gt;</a:t>
+            </a:r>
+            <a:r>
+              <a:rPr lang="en-US" sz="1050" dirty="0">
+                <a:solidFill>
+                  <a:srgbClr val="CCCCCC"/>
+                </a:solidFill>
+                <a:latin typeface="Courier New" pitchFamily="34" charset="0"/>
+                <a:ea typeface="Courier New" pitchFamily="34" charset="-122"/>
+                <a:cs typeface="Courier New" pitchFamily="34" charset="-120"/>
+              </a:rPr>
+              <a:t>item_counter</a:t>
             </a:r>
             <a:r>
               <a:rPr lang="en-US" sz="1050" dirty="0">
@@ -24277,7 +24205,7 @@
                 <a:ea typeface="Courier New" pitchFamily="34" charset="-122"/>
                 <a:cs typeface="Courier New" pitchFamily="34" charset="-120"/>
               </a:rPr>
-              <a:t>connection</a:t>
+              <a:t>item</a:t>
             </a:r>
             <a:r>
               <a:rPr lang="en-US" sz="1050" dirty="0">
@@ -24321,7 +24249,7 @@
                 <a:ea typeface="Courier New" pitchFamily="34" charset="-122"/>
                 <a:cs typeface="Courier New" pitchFamily="34" charset="-120"/>
               </a:rPr>
-              <a:t>connections</a:t>
+              <a:t>itens</a:t>
             </a:r>
             <a:r>
               <a:rPr lang="en-US" sz="1050" dirty="0">
@@ -25529,7 +25457,7 @@
         </p:blipFill>
         <p:spPr>
           <a:xfrm>
-            <a:off x="850392" y="2209800"/>
+            <a:off x="6511900" y="2209800"/>
             <a:ext cx="256032" cy="256032"/>
           </a:xfrm>
           <a:prstGeom prst="rect">
@@ -25553,7 +25481,7 @@
         </p:blipFill>
         <p:spPr>
           <a:xfrm>
-            <a:off x="6511900" y="2209800"/>
+            <a:off x="850392" y="4325112"/>
             <a:ext cx="256032" cy="256032"/>
           </a:xfrm>
           <a:prstGeom prst="rect">
@@ -25601,7 +25529,7 @@
         </p:blipFill>
         <p:spPr>
           <a:xfrm>
-            <a:off x="850392" y="4325112"/>
+            <a:off x="850392" y="2209800"/>
             <a:ext cx="256032" cy="256032"/>
           </a:xfrm>
           <a:prstGeom prst="rect">
